--- a/青年聖歌I/(青年聖歌I64)神的恩典.pptx
+++ b/青年聖歌I/(青年聖歌I64)神的恩典.pptx
@@ -5,10 +5,15 @@
     <p:sldMasterId id="2147483660" r:id="rId1"/>
   </p:sldMasterIdLst>
   <p:sldIdLst>
-    <p:sldId id="257" r:id="rId2"/>
-    <p:sldId id="258" r:id="rId3"/>
-    <p:sldId id="259" r:id="rId4"/>
-    <p:sldId id="260" r:id="rId5"/>
+    <p:sldId id="393" r:id="rId2"/>
+    <p:sldId id="412" r:id="rId3"/>
+    <p:sldId id="413" r:id="rId4"/>
+    <p:sldId id="414" r:id="rId5"/>
+    <p:sldId id="415" r:id="rId6"/>
+    <p:sldId id="416" r:id="rId7"/>
+    <p:sldId id="417" r:id="rId8"/>
+    <p:sldId id="418" r:id="rId9"/>
+    <p:sldId id="419" r:id="rId10"/>
   </p:sldIdLst>
   <p:sldSz cx="12192000" cy="6858000"/>
   <p:notesSz cx="6858000" cy="9144000"/>
@@ -107,6 +112,11 @@
       </a:defRPr>
     </a:lvl9pPr>
   </p:defaultTextStyle>
+  <p:extLst>
+    <p:ext uri="{EFAFB233-063F-42B5-8137-9DF3F51BA10A}">
+      <p15:sldGuideLst xmlns:p15="http://schemas.microsoft.com/office/powerpoint/2012/main"/>
+    </p:ext>
+  </p:extLst>
 </p:presentation>
 </file>
 
@@ -148,7 +158,7 @@
           <a:lstStyle/>
           <a:p>
             <a:r>
-              <a:rPr lang="en-US" altLang="zh-TW" smtClean="0"/>
+              <a:rPr lang="en-US" altLang="zh-TW"/>
               <a:t>Click to edit Master title style</a:t>
             </a:r>
             <a:endParaRPr lang="zh-TW" altLang="en-US"/>
@@ -267,7 +277,7 @@
           </a:lstStyle>
           <a:p>
             <a:r>
-              <a:rPr lang="en-US" altLang="zh-TW" smtClean="0"/>
+              <a:rPr lang="en-US" altLang="zh-TW"/>
               <a:t>Click to edit Master subtitle style</a:t>
             </a:r>
             <a:endParaRPr lang="zh-TW" altLang="en-US"/>
@@ -291,7 +301,7 @@
           <a:p>
             <a:fld id="{50510D84-ECFE-4A5E-B97A-6DE7C6BB60BA}" type="datetimeFigureOut">
               <a:rPr lang="vi-VN" smtClean="0"/>
-              <a:t>28/02/2020</a:t>
+              <a:t>14/08/2026</a:t>
             </a:fld>
             <a:endParaRPr lang="vi-VN"/>
           </a:p>
@@ -385,7 +395,7 @@
           <a:lstStyle/>
           <a:p>
             <a:r>
-              <a:rPr lang="en-US" altLang="zh-TW" smtClean="0"/>
+              <a:rPr lang="en-US" altLang="zh-TW"/>
               <a:t>Click to edit Master title style</a:t>
             </a:r>
             <a:endParaRPr lang="zh-TW" altLang="en-US"/>
@@ -409,35 +419,35 @@
           <a:p>
             <a:pPr lvl="0"/>
             <a:r>
-              <a:rPr lang="en-US" altLang="zh-TW" smtClean="0"/>
+              <a:rPr lang="en-US" altLang="zh-TW"/>
               <a:t>Edit Master text styles</a:t>
             </a:r>
           </a:p>
           <a:p>
             <a:pPr lvl="1"/>
             <a:r>
-              <a:rPr lang="en-US" altLang="zh-TW" smtClean="0"/>
+              <a:rPr lang="en-US" altLang="zh-TW"/>
               <a:t>Second level</a:t>
             </a:r>
           </a:p>
           <a:p>
             <a:pPr lvl="2"/>
             <a:r>
-              <a:rPr lang="en-US" altLang="zh-TW" smtClean="0"/>
+              <a:rPr lang="en-US" altLang="zh-TW"/>
               <a:t>Third level</a:t>
             </a:r>
           </a:p>
           <a:p>
             <a:pPr lvl="3"/>
             <a:r>
-              <a:rPr lang="en-US" altLang="zh-TW" smtClean="0"/>
+              <a:rPr lang="en-US" altLang="zh-TW"/>
               <a:t>Fourth level</a:t>
             </a:r>
           </a:p>
           <a:p>
             <a:pPr lvl="4"/>
             <a:r>
-              <a:rPr lang="en-US" altLang="zh-TW" smtClean="0"/>
+              <a:rPr lang="en-US" altLang="zh-TW"/>
               <a:t>Fifth level</a:t>
             </a:r>
             <a:endParaRPr lang="zh-TW" altLang="en-US"/>
@@ -461,7 +471,7 @@
           <a:p>
             <a:fld id="{50510D84-ECFE-4A5E-B97A-6DE7C6BB60BA}" type="datetimeFigureOut">
               <a:rPr lang="vi-VN" smtClean="0"/>
-              <a:t>28/02/2020</a:t>
+              <a:t>14/08/2026</a:t>
             </a:fld>
             <a:endParaRPr lang="vi-VN"/>
           </a:p>
@@ -560,7 +570,7 @@
           <a:lstStyle/>
           <a:p>
             <a:r>
-              <a:rPr lang="en-US" altLang="zh-TW" smtClean="0"/>
+              <a:rPr lang="en-US" altLang="zh-TW"/>
               <a:t>Click to edit Master title style</a:t>
             </a:r>
             <a:endParaRPr lang="zh-TW" altLang="en-US"/>
@@ -589,35 +599,35 @@
           <a:p>
             <a:pPr lvl="0"/>
             <a:r>
-              <a:rPr lang="en-US" altLang="zh-TW" smtClean="0"/>
+              <a:rPr lang="en-US" altLang="zh-TW"/>
               <a:t>Edit Master text styles</a:t>
             </a:r>
           </a:p>
           <a:p>
             <a:pPr lvl="1"/>
             <a:r>
-              <a:rPr lang="en-US" altLang="zh-TW" smtClean="0"/>
+              <a:rPr lang="en-US" altLang="zh-TW"/>
               <a:t>Second level</a:t>
             </a:r>
           </a:p>
           <a:p>
             <a:pPr lvl="2"/>
             <a:r>
-              <a:rPr lang="en-US" altLang="zh-TW" smtClean="0"/>
+              <a:rPr lang="en-US" altLang="zh-TW"/>
               <a:t>Third level</a:t>
             </a:r>
           </a:p>
           <a:p>
             <a:pPr lvl="3"/>
             <a:r>
-              <a:rPr lang="en-US" altLang="zh-TW" smtClean="0"/>
+              <a:rPr lang="en-US" altLang="zh-TW"/>
               <a:t>Fourth level</a:t>
             </a:r>
           </a:p>
           <a:p>
             <a:pPr lvl="4"/>
             <a:r>
-              <a:rPr lang="en-US" altLang="zh-TW" smtClean="0"/>
+              <a:rPr lang="en-US" altLang="zh-TW"/>
               <a:t>Fifth level</a:t>
             </a:r>
             <a:endParaRPr lang="zh-TW" altLang="en-US"/>
@@ -641,7 +651,7 @@
           <a:p>
             <a:fld id="{50510D84-ECFE-4A5E-B97A-6DE7C6BB60BA}" type="datetimeFigureOut">
               <a:rPr lang="vi-VN" smtClean="0"/>
-              <a:t>28/02/2020</a:t>
+              <a:t>14/08/2026</a:t>
             </a:fld>
             <a:endParaRPr lang="vi-VN"/>
           </a:p>
@@ -735,7 +745,7 @@
           <a:lstStyle/>
           <a:p>
             <a:r>
-              <a:rPr lang="en-US" altLang="zh-TW" smtClean="0"/>
+              <a:rPr lang="en-US" altLang="zh-TW"/>
               <a:t>Click to edit Master title style</a:t>
             </a:r>
             <a:endParaRPr lang="zh-TW" altLang="en-US"/>
@@ -759,35 +769,35 @@
           <a:p>
             <a:pPr lvl="0"/>
             <a:r>
-              <a:rPr lang="en-US" altLang="zh-TW" smtClean="0"/>
+              <a:rPr lang="en-US" altLang="zh-TW"/>
               <a:t>Edit Master text styles</a:t>
             </a:r>
           </a:p>
           <a:p>
             <a:pPr lvl="1"/>
             <a:r>
-              <a:rPr lang="en-US" altLang="zh-TW" smtClean="0"/>
+              <a:rPr lang="en-US" altLang="zh-TW"/>
               <a:t>Second level</a:t>
             </a:r>
           </a:p>
           <a:p>
             <a:pPr lvl="2"/>
             <a:r>
-              <a:rPr lang="en-US" altLang="zh-TW" smtClean="0"/>
+              <a:rPr lang="en-US" altLang="zh-TW"/>
               <a:t>Third level</a:t>
             </a:r>
           </a:p>
           <a:p>
             <a:pPr lvl="3"/>
             <a:r>
-              <a:rPr lang="en-US" altLang="zh-TW" smtClean="0"/>
+              <a:rPr lang="en-US" altLang="zh-TW"/>
               <a:t>Fourth level</a:t>
             </a:r>
           </a:p>
           <a:p>
             <a:pPr lvl="4"/>
             <a:r>
-              <a:rPr lang="en-US" altLang="zh-TW" smtClean="0"/>
+              <a:rPr lang="en-US" altLang="zh-TW"/>
               <a:t>Fifth level</a:t>
             </a:r>
             <a:endParaRPr lang="zh-TW" altLang="en-US"/>
@@ -811,7 +821,7 @@
           <a:p>
             <a:fld id="{50510D84-ECFE-4A5E-B97A-6DE7C6BB60BA}" type="datetimeFigureOut">
               <a:rPr lang="vi-VN" smtClean="0"/>
-              <a:t>28/02/2020</a:t>
+              <a:t>14/08/2026</a:t>
             </a:fld>
             <a:endParaRPr lang="vi-VN"/>
           </a:p>
@@ -914,7 +924,7 @@
           </a:lstStyle>
           <a:p>
             <a:r>
-              <a:rPr lang="en-US" altLang="zh-TW" smtClean="0"/>
+              <a:rPr lang="en-US" altLang="zh-TW"/>
               <a:t>Click to edit Master title style</a:t>
             </a:r>
             <a:endParaRPr lang="zh-TW" altLang="en-US"/>
@@ -1034,7 +1044,7 @@
           <a:p>
             <a:pPr lvl="0"/>
             <a:r>
-              <a:rPr lang="en-US" altLang="zh-TW" smtClean="0"/>
+              <a:rPr lang="en-US" altLang="zh-TW"/>
               <a:t>Edit Master text styles</a:t>
             </a:r>
           </a:p>
@@ -1057,7 +1067,7 @@
           <a:p>
             <a:fld id="{50510D84-ECFE-4A5E-B97A-6DE7C6BB60BA}" type="datetimeFigureOut">
               <a:rPr lang="vi-VN" smtClean="0"/>
-              <a:t>28/02/2020</a:t>
+              <a:t>14/08/2026</a:t>
             </a:fld>
             <a:endParaRPr lang="vi-VN"/>
           </a:p>
@@ -1151,7 +1161,7 @@
           <a:lstStyle/>
           <a:p>
             <a:r>
-              <a:rPr lang="en-US" altLang="zh-TW" smtClean="0"/>
+              <a:rPr lang="en-US" altLang="zh-TW"/>
               <a:t>Click to edit Master title style</a:t>
             </a:r>
             <a:endParaRPr lang="zh-TW" altLang="en-US"/>
@@ -1208,35 +1218,35 @@
           <a:p>
             <a:pPr lvl="0"/>
             <a:r>
-              <a:rPr lang="en-US" altLang="zh-TW" smtClean="0"/>
+              <a:rPr lang="en-US" altLang="zh-TW"/>
               <a:t>Edit Master text styles</a:t>
             </a:r>
           </a:p>
           <a:p>
             <a:pPr lvl="1"/>
             <a:r>
-              <a:rPr lang="en-US" altLang="zh-TW" smtClean="0"/>
+              <a:rPr lang="en-US" altLang="zh-TW"/>
               <a:t>Second level</a:t>
             </a:r>
           </a:p>
           <a:p>
             <a:pPr lvl="2"/>
             <a:r>
-              <a:rPr lang="en-US" altLang="zh-TW" smtClean="0"/>
+              <a:rPr lang="en-US" altLang="zh-TW"/>
               <a:t>Third level</a:t>
             </a:r>
           </a:p>
           <a:p>
             <a:pPr lvl="3"/>
             <a:r>
-              <a:rPr lang="en-US" altLang="zh-TW" smtClean="0"/>
+              <a:rPr lang="en-US" altLang="zh-TW"/>
               <a:t>Fourth level</a:t>
             </a:r>
           </a:p>
           <a:p>
             <a:pPr lvl="4"/>
             <a:r>
-              <a:rPr lang="en-US" altLang="zh-TW" smtClean="0"/>
+              <a:rPr lang="en-US" altLang="zh-TW"/>
               <a:t>Fifth level</a:t>
             </a:r>
             <a:endParaRPr lang="zh-TW" altLang="en-US"/>
@@ -1293,35 +1303,35 @@
           <a:p>
             <a:pPr lvl="0"/>
             <a:r>
-              <a:rPr lang="en-US" altLang="zh-TW" smtClean="0"/>
+              <a:rPr lang="en-US" altLang="zh-TW"/>
               <a:t>Edit Master text styles</a:t>
             </a:r>
           </a:p>
           <a:p>
             <a:pPr lvl="1"/>
             <a:r>
-              <a:rPr lang="en-US" altLang="zh-TW" smtClean="0"/>
+              <a:rPr lang="en-US" altLang="zh-TW"/>
               <a:t>Second level</a:t>
             </a:r>
           </a:p>
           <a:p>
             <a:pPr lvl="2"/>
             <a:r>
-              <a:rPr lang="en-US" altLang="zh-TW" smtClean="0"/>
+              <a:rPr lang="en-US" altLang="zh-TW"/>
               <a:t>Third level</a:t>
             </a:r>
           </a:p>
           <a:p>
             <a:pPr lvl="3"/>
             <a:r>
-              <a:rPr lang="en-US" altLang="zh-TW" smtClean="0"/>
+              <a:rPr lang="en-US" altLang="zh-TW"/>
               <a:t>Fourth level</a:t>
             </a:r>
           </a:p>
           <a:p>
             <a:pPr lvl="4"/>
             <a:r>
-              <a:rPr lang="en-US" altLang="zh-TW" smtClean="0"/>
+              <a:rPr lang="en-US" altLang="zh-TW"/>
               <a:t>Fifth level</a:t>
             </a:r>
             <a:endParaRPr lang="zh-TW" altLang="en-US"/>
@@ -1345,7 +1355,7 @@
           <a:p>
             <a:fld id="{50510D84-ECFE-4A5E-B97A-6DE7C6BB60BA}" type="datetimeFigureOut">
               <a:rPr lang="vi-VN" smtClean="0"/>
-              <a:t>28/02/2020</a:t>
+              <a:t>14/08/2026</a:t>
             </a:fld>
             <a:endParaRPr lang="vi-VN"/>
           </a:p>
@@ -1443,7 +1453,7 @@
           </a:lstStyle>
           <a:p>
             <a:r>
-              <a:rPr lang="en-US" altLang="zh-TW" smtClean="0"/>
+              <a:rPr lang="en-US" altLang="zh-TW"/>
               <a:t>Click to edit Master title style</a:t>
             </a:r>
             <a:endParaRPr lang="zh-TW" altLang="en-US"/>
@@ -1509,7 +1519,7 @@
           <a:p>
             <a:pPr lvl="0"/>
             <a:r>
-              <a:rPr lang="en-US" altLang="zh-TW" smtClean="0"/>
+              <a:rPr lang="en-US" altLang="zh-TW"/>
               <a:t>Edit Master text styles</a:t>
             </a:r>
           </a:p>
@@ -1565,35 +1575,35 @@
           <a:p>
             <a:pPr lvl="0"/>
             <a:r>
-              <a:rPr lang="en-US" altLang="zh-TW" smtClean="0"/>
+              <a:rPr lang="en-US" altLang="zh-TW"/>
               <a:t>Edit Master text styles</a:t>
             </a:r>
           </a:p>
           <a:p>
             <a:pPr lvl="1"/>
             <a:r>
-              <a:rPr lang="en-US" altLang="zh-TW" smtClean="0"/>
+              <a:rPr lang="en-US" altLang="zh-TW"/>
               <a:t>Second level</a:t>
             </a:r>
           </a:p>
           <a:p>
             <a:pPr lvl="2"/>
             <a:r>
-              <a:rPr lang="en-US" altLang="zh-TW" smtClean="0"/>
+              <a:rPr lang="en-US" altLang="zh-TW"/>
               <a:t>Third level</a:t>
             </a:r>
           </a:p>
           <a:p>
             <a:pPr lvl="3"/>
             <a:r>
-              <a:rPr lang="en-US" altLang="zh-TW" smtClean="0"/>
+              <a:rPr lang="en-US" altLang="zh-TW"/>
               <a:t>Fourth level</a:t>
             </a:r>
           </a:p>
           <a:p>
             <a:pPr lvl="4"/>
             <a:r>
-              <a:rPr lang="en-US" altLang="zh-TW" smtClean="0"/>
+              <a:rPr lang="en-US" altLang="zh-TW"/>
               <a:t>Fifth level</a:t>
             </a:r>
             <a:endParaRPr lang="zh-TW" altLang="en-US"/>
@@ -1659,7 +1669,7 @@
           <a:p>
             <a:pPr lvl="0"/>
             <a:r>
-              <a:rPr lang="en-US" altLang="zh-TW" smtClean="0"/>
+              <a:rPr lang="en-US" altLang="zh-TW"/>
               <a:t>Edit Master text styles</a:t>
             </a:r>
           </a:p>
@@ -1715,35 +1725,35 @@
           <a:p>
             <a:pPr lvl="0"/>
             <a:r>
-              <a:rPr lang="en-US" altLang="zh-TW" smtClean="0"/>
+              <a:rPr lang="en-US" altLang="zh-TW"/>
               <a:t>Edit Master text styles</a:t>
             </a:r>
           </a:p>
           <a:p>
             <a:pPr lvl="1"/>
             <a:r>
-              <a:rPr lang="en-US" altLang="zh-TW" smtClean="0"/>
+              <a:rPr lang="en-US" altLang="zh-TW"/>
               <a:t>Second level</a:t>
             </a:r>
           </a:p>
           <a:p>
             <a:pPr lvl="2"/>
             <a:r>
-              <a:rPr lang="en-US" altLang="zh-TW" smtClean="0"/>
+              <a:rPr lang="en-US" altLang="zh-TW"/>
               <a:t>Third level</a:t>
             </a:r>
           </a:p>
           <a:p>
             <a:pPr lvl="3"/>
             <a:r>
-              <a:rPr lang="en-US" altLang="zh-TW" smtClean="0"/>
+              <a:rPr lang="en-US" altLang="zh-TW"/>
               <a:t>Fourth level</a:t>
             </a:r>
           </a:p>
           <a:p>
             <a:pPr lvl="4"/>
             <a:r>
-              <a:rPr lang="en-US" altLang="zh-TW" smtClean="0"/>
+              <a:rPr lang="en-US" altLang="zh-TW"/>
               <a:t>Fifth level</a:t>
             </a:r>
             <a:endParaRPr lang="zh-TW" altLang="en-US"/>
@@ -1767,7 +1777,7 @@
           <a:p>
             <a:fld id="{50510D84-ECFE-4A5E-B97A-6DE7C6BB60BA}" type="datetimeFigureOut">
               <a:rPr lang="vi-VN" smtClean="0"/>
-              <a:t>28/02/2020</a:t>
+              <a:t>14/08/2026</a:t>
             </a:fld>
             <a:endParaRPr lang="vi-VN"/>
           </a:p>
@@ -1861,7 +1871,7 @@
           <a:lstStyle/>
           <a:p>
             <a:r>
-              <a:rPr lang="en-US" altLang="zh-TW" smtClean="0"/>
+              <a:rPr lang="en-US" altLang="zh-TW"/>
               <a:t>Click to edit Master title style</a:t>
             </a:r>
             <a:endParaRPr lang="zh-TW" altLang="en-US"/>
@@ -1885,7 +1895,7 @@
           <a:p>
             <a:fld id="{50510D84-ECFE-4A5E-B97A-6DE7C6BB60BA}" type="datetimeFigureOut">
               <a:rPr lang="vi-VN" smtClean="0"/>
-              <a:t>28/02/2020</a:t>
+              <a:t>14/08/2026</a:t>
             </a:fld>
             <a:endParaRPr lang="vi-VN"/>
           </a:p>
@@ -1980,7 +1990,7 @@
           <a:p>
             <a:fld id="{50510D84-ECFE-4A5E-B97A-6DE7C6BB60BA}" type="datetimeFigureOut">
               <a:rPr lang="vi-VN" smtClean="0"/>
-              <a:t>28/02/2020</a:t>
+              <a:t>14/08/2026</a:t>
             </a:fld>
             <a:endParaRPr lang="vi-VN"/>
           </a:p>
@@ -2083,7 +2093,7 @@
           </a:lstStyle>
           <a:p>
             <a:r>
-              <a:rPr lang="en-US" altLang="zh-TW" smtClean="0"/>
+              <a:rPr lang="en-US" altLang="zh-TW"/>
               <a:t>Click to edit Master title style</a:t>
             </a:r>
             <a:endParaRPr lang="zh-TW" altLang="en-US"/>
@@ -2140,35 +2150,35 @@
           <a:p>
             <a:pPr lvl="0"/>
             <a:r>
-              <a:rPr lang="en-US" altLang="zh-TW" smtClean="0"/>
+              <a:rPr lang="en-US" altLang="zh-TW"/>
               <a:t>Edit Master text styles</a:t>
             </a:r>
           </a:p>
           <a:p>
             <a:pPr lvl="1"/>
             <a:r>
-              <a:rPr lang="en-US" altLang="zh-TW" smtClean="0"/>
+              <a:rPr lang="en-US" altLang="zh-TW"/>
               <a:t>Second level</a:t>
             </a:r>
           </a:p>
           <a:p>
             <a:pPr lvl="2"/>
             <a:r>
-              <a:rPr lang="en-US" altLang="zh-TW" smtClean="0"/>
+              <a:rPr lang="en-US" altLang="zh-TW"/>
               <a:t>Third level</a:t>
             </a:r>
           </a:p>
           <a:p>
             <a:pPr lvl="3"/>
             <a:r>
-              <a:rPr lang="en-US" altLang="zh-TW" smtClean="0"/>
+              <a:rPr lang="en-US" altLang="zh-TW"/>
               <a:t>Fourth level</a:t>
             </a:r>
           </a:p>
           <a:p>
             <a:pPr lvl="4"/>
             <a:r>
-              <a:rPr lang="en-US" altLang="zh-TW" smtClean="0"/>
+              <a:rPr lang="en-US" altLang="zh-TW"/>
               <a:t>Fifth level</a:t>
             </a:r>
             <a:endParaRPr lang="zh-TW" altLang="en-US"/>
@@ -2234,7 +2244,7 @@
           <a:p>
             <a:pPr lvl="0"/>
             <a:r>
-              <a:rPr lang="en-US" altLang="zh-TW" smtClean="0"/>
+              <a:rPr lang="en-US" altLang="zh-TW"/>
               <a:t>Edit Master text styles</a:t>
             </a:r>
           </a:p>
@@ -2257,7 +2267,7 @@
           <a:p>
             <a:fld id="{50510D84-ECFE-4A5E-B97A-6DE7C6BB60BA}" type="datetimeFigureOut">
               <a:rPr lang="vi-VN" smtClean="0"/>
-              <a:t>28/02/2020</a:t>
+              <a:t>14/08/2026</a:t>
             </a:fld>
             <a:endParaRPr lang="vi-VN"/>
           </a:p>
@@ -2360,7 +2370,7 @@
           </a:lstStyle>
           <a:p>
             <a:r>
-              <a:rPr lang="en-US" altLang="zh-TW" smtClean="0"/>
+              <a:rPr lang="en-US" altLang="zh-TW"/>
               <a:t>Click to edit Master title style</a:t>
             </a:r>
             <a:endParaRPr lang="zh-TW" altLang="en-US"/>
@@ -2425,7 +2435,7 @@
           </a:lstStyle>
           <a:p>
             <a:r>
-              <a:rPr lang="en-US" altLang="zh-TW" smtClean="0"/>
+              <a:rPr lang="en-US" altLang="zh-TW"/>
               <a:t>Click icon to add picture</a:t>
             </a:r>
             <a:endParaRPr lang="zh-TW" altLang="en-US"/>
@@ -2491,7 +2501,7 @@
           <a:p>
             <a:pPr lvl="0"/>
             <a:r>
-              <a:rPr lang="en-US" altLang="zh-TW" smtClean="0"/>
+              <a:rPr lang="en-US" altLang="zh-TW"/>
               <a:t>Edit Master text styles</a:t>
             </a:r>
           </a:p>
@@ -2514,7 +2524,7 @@
           <a:p>
             <a:fld id="{50510D84-ECFE-4A5E-B97A-6DE7C6BB60BA}" type="datetimeFigureOut">
               <a:rPr lang="vi-VN" smtClean="0"/>
-              <a:t>28/02/2020</a:t>
+              <a:t>14/08/2026</a:t>
             </a:fld>
             <a:endParaRPr lang="vi-VN"/>
           </a:p>
@@ -2628,10 +2638,9 @@
           <a:lstStyle/>
           <a:p>
             <a:r>
-              <a:rPr lang="zh-TW" altLang="en-US" smtClean="0"/>
+              <a:rPr lang="zh-TW" altLang="en-US"/>
               <a:t>按一下以編輯母片標題樣式</a:t>
             </a:r>
-            <a:endParaRPr lang="zh-TW" altLang="en-US"/>
           </a:p>
         </p:txBody>
       </p:sp>
@@ -2662,38 +2671,37 @@
           <a:p>
             <a:pPr lvl="0"/>
             <a:r>
-              <a:rPr lang="zh-TW" altLang="en-US" smtClean="0"/>
+              <a:rPr lang="zh-TW" altLang="en-US"/>
               <a:t>按一下以編輯母片文字樣式</a:t>
             </a:r>
           </a:p>
           <a:p>
             <a:pPr lvl="1"/>
             <a:r>
-              <a:rPr lang="zh-TW" altLang="en-US" smtClean="0"/>
+              <a:rPr lang="zh-TW" altLang="en-US"/>
               <a:t>第二層</a:t>
             </a:r>
           </a:p>
           <a:p>
             <a:pPr lvl="2"/>
             <a:r>
-              <a:rPr lang="zh-TW" altLang="en-US" smtClean="0"/>
+              <a:rPr lang="zh-TW" altLang="en-US"/>
               <a:t>第三層</a:t>
             </a:r>
           </a:p>
           <a:p>
             <a:pPr lvl="3"/>
             <a:r>
-              <a:rPr lang="zh-TW" altLang="en-US" smtClean="0"/>
+              <a:rPr lang="zh-TW" altLang="en-US"/>
               <a:t>第四層</a:t>
             </a:r>
           </a:p>
           <a:p>
             <a:pPr lvl="4"/>
             <a:r>
-              <a:rPr lang="zh-TW" altLang="en-US" smtClean="0"/>
+              <a:rPr lang="zh-TW" altLang="en-US"/>
               <a:t>第五層</a:t>
             </a:r>
-            <a:endParaRPr lang="zh-TW" altLang="en-US"/>
           </a:p>
         </p:txBody>
       </p:sp>
@@ -2732,7 +2740,7 @@
           <a:p>
             <a:fld id="{50510D84-ECFE-4A5E-B97A-6DE7C6BB60BA}" type="datetimeFigureOut">
               <a:rPr lang="vi-VN" smtClean="0"/>
-              <a:t>28/02/2020</a:t>
+              <a:t>14/08/2026</a:t>
             </a:fld>
             <a:endParaRPr lang="vi-VN"/>
           </a:p>
@@ -3109,7 +3117,7 @@
       </p:grpSpPr>
       <p:sp>
         <p:nvSpPr>
-          <p:cNvPr id="2" name="Title 1"/>
+          <p:cNvPr id="4" name="標題 3"/>
           <p:cNvSpPr>
             <a:spLocks noGrp="1"/>
           </p:cNvSpPr>
@@ -3117,160 +3125,126 @@
             <p:ph type="title"/>
           </p:nvPr>
         </p:nvSpPr>
-        <p:spPr/>
+        <p:spPr>
+          <a:xfrm>
+            <a:off x="0" y="2660915"/>
+            <a:ext cx="12192000" cy="1143000"/>
+          </a:xfrm>
+        </p:spPr>
         <p:txBody>
           <a:bodyPr>
-            <a:normAutofit/>
+            <a:noAutofit/>
           </a:bodyPr>
           <a:lstStyle/>
           <a:p>
             <a:r>
-              <a:rPr lang="zh-CN" altLang="en-US" sz="4800" b="1" dirty="0" smtClean="0">
-                <a:latin typeface="Microsoft JhengHei" panose="020B0604030504040204" pitchFamily="34" charset="-120"/>
-                <a:ea typeface="Microsoft JhengHei" panose="020B0604030504040204" pitchFamily="34" charset="-120"/>
+              <a:rPr lang="zh-CN" altLang="en-US" sz="5333" b="1" u="sng" dirty="0">
+                <a:solidFill>
+                  <a:srgbClr val="000066"/>
+                </a:solidFill>
+                <a:effectLst>
+                  <a:outerShdw blurRad="38100" dist="38100" dir="2700000" algn="tl">
+                    <a:srgbClr val="000000">
+                      <a:alpha val="43137"/>
+                    </a:srgbClr>
+                  </a:outerShdw>
+                </a:effectLst>
+                <a:latin typeface="微軟正黑體" pitchFamily="34" charset="-120"/>
+                <a:ea typeface="微軟正黑體" pitchFamily="34" charset="-120"/>
+              </a:rPr>
+              <a:t>青年聖歌</a:t>
+            </a:r>
+            <a:r>
+              <a:rPr lang="en-US" altLang="zh-CN" sz="5333" b="1" u="sng" dirty="0">
+                <a:solidFill>
+                  <a:srgbClr val="000066"/>
+                </a:solidFill>
+                <a:effectLst>
+                  <a:outerShdw blurRad="38100" dist="38100" dir="2700000" algn="tl">
+                    <a:srgbClr val="000000">
+                      <a:alpha val="43137"/>
+                    </a:srgbClr>
+                  </a:outerShdw>
+                </a:effectLst>
+                <a:latin typeface="微軟正黑體" pitchFamily="34" charset="-120"/>
+                <a:ea typeface="微軟正黑體" pitchFamily="34" charset="-120"/>
+              </a:rPr>
+              <a:t> I</a:t>
+            </a:r>
+            <a:r>
+              <a:rPr lang="zh-CN" altLang="en-US" sz="5333" b="1" u="sng" dirty="0">
+                <a:solidFill>
+                  <a:srgbClr val="000066"/>
+                </a:solidFill>
+                <a:effectLst>
+                  <a:outerShdw blurRad="38100" dist="38100" dir="2700000" algn="tl">
+                    <a:srgbClr val="000000">
+                      <a:alpha val="43137"/>
+                    </a:srgbClr>
+                  </a:outerShdw>
+                </a:effectLst>
+                <a:latin typeface="微軟正黑體" pitchFamily="34" charset="-120"/>
+                <a:ea typeface="微軟正黑體" pitchFamily="34" charset="-120"/>
+              </a:rPr>
+              <a:t> </a:t>
+            </a:r>
+            <a:r>
+              <a:rPr lang="en-US" altLang="zh-CN" sz="5333" b="1" u="sng" dirty="0">
+                <a:solidFill>
+                  <a:srgbClr val="000066"/>
+                </a:solidFill>
+                <a:effectLst>
+                  <a:outerShdw blurRad="38100" dist="38100" dir="2700000" algn="tl">
+                    <a:srgbClr val="000000">
+                      <a:alpha val="43137"/>
+                    </a:srgbClr>
+                  </a:outerShdw>
+                </a:effectLst>
+                <a:latin typeface="微軟正黑體" pitchFamily="34" charset="-120"/>
+                <a:ea typeface="微軟正黑體" pitchFamily="34" charset="-120"/>
+              </a:rPr>
+              <a:t>64</a:t>
+            </a:r>
+            <a:br>
+              <a:rPr lang="en-US" altLang="zh-CN" sz="7200" b="1" i="1" dirty="0">
+                <a:solidFill>
+                  <a:srgbClr val="660033"/>
+                </a:solidFill>
+                <a:effectLst>
+                  <a:outerShdw blurRad="38100" dist="38100" dir="2700000" algn="tl">
+                    <a:srgbClr val="000000">
+                      <a:alpha val="43137"/>
+                    </a:srgbClr>
+                  </a:outerShdw>
+                </a:effectLst>
+                <a:latin typeface="微軟正黑體" pitchFamily="34" charset="-120"/>
+                <a:ea typeface="微軟正黑體" pitchFamily="34" charset="-120"/>
+              </a:rPr>
+            </a:br>
+            <a:r>
+              <a:rPr lang="zh-TW" altLang="en-US" sz="8000" b="1" dirty="0">
+                <a:solidFill>
+                  <a:srgbClr val="660033"/>
+                </a:solidFill>
+                <a:effectLst>
+                  <a:outerShdw blurRad="38100" dist="38100" dir="2700000" algn="tl">
+                    <a:srgbClr val="000000">
+                      <a:alpha val="43137"/>
+                    </a:srgbClr>
+                  </a:outerShdw>
+                </a:effectLst>
+                <a:latin typeface="微軟正黑體" pitchFamily="34" charset="-120"/>
+                <a:ea typeface="微軟正黑體" pitchFamily="34" charset="-120"/>
               </a:rPr>
               <a:t>神的恩典</a:t>
             </a:r>
-            <a:endParaRPr lang="vi-VN" sz="4800" b="1" dirty="0">
-              <a:ea typeface="Microsoft JhengHei" panose="020B0604030504040204" pitchFamily="34" charset="-120"/>
-            </a:endParaRPr>
-          </a:p>
-        </p:txBody>
-      </p:sp>
-      <p:sp>
-        <p:nvSpPr>
-          <p:cNvPr id="3" name="Content Placeholder 2"/>
-          <p:cNvSpPr>
-            <a:spLocks noGrp="1"/>
-          </p:cNvSpPr>
-          <p:nvPr>
-            <p:ph idx="1"/>
-          </p:nvPr>
-        </p:nvSpPr>
-        <p:spPr/>
-        <p:txBody>
-          <a:bodyPr>
-            <a:normAutofit/>
-          </a:bodyPr>
-          <a:lstStyle/>
-          <a:p>
-            <a:pPr marL="0" indent="0" algn="ctr">
-              <a:buNone/>
-            </a:pPr>
-            <a:r>
-              <a:rPr lang="zh-TW" altLang="en-US" sz="5400" b="1" dirty="0">
-                <a:latin typeface="Microsoft JhengHei" panose="020B0604030504040204" pitchFamily="34" charset="-120"/>
-                <a:ea typeface="Microsoft JhengHei" panose="020B0604030504040204" pitchFamily="34" charset="-120"/>
-              </a:rPr>
-              <a:t>真神恩典遠高過諸</a:t>
-            </a:r>
-            <a:r>
-              <a:rPr lang="zh-TW" altLang="en-US" sz="5400" b="1" dirty="0" smtClean="0">
-                <a:latin typeface="Microsoft JhengHei" panose="020B0604030504040204" pitchFamily="34" charset="-120"/>
-                <a:ea typeface="Microsoft JhengHei" panose="020B0604030504040204" pitchFamily="34" charset="-120"/>
-              </a:rPr>
-              <a:t>天</a:t>
-            </a:r>
-            <a:endParaRPr lang="en-US" altLang="zh-TW" sz="5400" b="1" dirty="0">
-              <a:latin typeface="Microsoft JhengHei" panose="020B0604030504040204" pitchFamily="34" charset="-120"/>
-              <a:ea typeface="Microsoft JhengHei" panose="020B0604030504040204" pitchFamily="34" charset="-120"/>
-            </a:endParaRPr>
-          </a:p>
-          <a:p>
-            <a:pPr marL="0" indent="0" algn="ctr">
-              <a:buNone/>
-            </a:pPr>
-            <a:r>
-              <a:rPr lang="zh-TW" altLang="en-US" sz="5400" b="1" dirty="0" smtClean="0">
-                <a:latin typeface="Microsoft JhengHei" panose="020B0604030504040204" pitchFamily="34" charset="-120"/>
-                <a:ea typeface="Microsoft JhengHei" panose="020B0604030504040204" pitchFamily="34" charset="-120"/>
-              </a:rPr>
-              <a:t>真</a:t>
-            </a:r>
-            <a:r>
-              <a:rPr lang="zh-TW" altLang="en-US" sz="5400" b="1" dirty="0">
-                <a:latin typeface="Microsoft JhengHei" panose="020B0604030504040204" pitchFamily="34" charset="-120"/>
-                <a:ea typeface="Microsoft JhengHei" panose="020B0604030504040204" pitchFamily="34" charset="-120"/>
-              </a:rPr>
-              <a:t>神恩典深過海</a:t>
-            </a:r>
-            <a:r>
-              <a:rPr lang="zh-TW" altLang="en-US" sz="5400" b="1" dirty="0" smtClean="0">
-                <a:latin typeface="Microsoft JhengHei" panose="020B0604030504040204" pitchFamily="34" charset="-120"/>
-                <a:ea typeface="Microsoft JhengHei" panose="020B0604030504040204" pitchFamily="34" charset="-120"/>
-              </a:rPr>
-              <a:t>洋</a:t>
-            </a:r>
-            <a:endParaRPr lang="en-US" altLang="zh-TW" sz="5400" b="1" dirty="0">
-              <a:latin typeface="Microsoft JhengHei" panose="020B0604030504040204" pitchFamily="34" charset="-120"/>
-              <a:ea typeface="Microsoft JhengHei" panose="020B0604030504040204" pitchFamily="34" charset="-120"/>
-            </a:endParaRPr>
-          </a:p>
-          <a:p>
-            <a:pPr marL="0" indent="0" algn="ctr">
-              <a:buNone/>
-            </a:pPr>
-            <a:r>
-              <a:rPr lang="zh-TW" altLang="en-US" sz="5400" b="1" dirty="0" smtClean="0">
-                <a:latin typeface="Microsoft JhengHei" panose="020B0604030504040204" pitchFamily="34" charset="-120"/>
-                <a:ea typeface="Microsoft JhengHei" panose="020B0604030504040204" pitchFamily="34" charset="-120"/>
-              </a:rPr>
-              <a:t>真</a:t>
-            </a:r>
-            <a:r>
-              <a:rPr lang="zh-TW" altLang="en-US" sz="5400" b="1" dirty="0">
-                <a:latin typeface="Microsoft JhengHei" panose="020B0604030504040204" pitchFamily="34" charset="-120"/>
-                <a:ea typeface="Microsoft JhengHei" panose="020B0604030504040204" pitchFamily="34" charset="-120"/>
-              </a:rPr>
-              <a:t>神恩典闊過大洋</a:t>
-            </a:r>
-            <a:r>
-              <a:rPr lang="zh-TW" altLang="en-US" sz="5400" b="1" dirty="0" smtClean="0">
-                <a:latin typeface="Microsoft JhengHei" panose="020B0604030504040204" pitchFamily="34" charset="-120"/>
-                <a:ea typeface="Microsoft JhengHei" panose="020B0604030504040204" pitchFamily="34" charset="-120"/>
-              </a:rPr>
-              <a:t>海</a:t>
-            </a:r>
-            <a:endParaRPr lang="en-US" altLang="zh-TW" sz="5400" b="1" dirty="0">
-              <a:latin typeface="Microsoft JhengHei" panose="020B0604030504040204" pitchFamily="34" charset="-120"/>
-              <a:ea typeface="Microsoft JhengHei" panose="020B0604030504040204" pitchFamily="34" charset="-120"/>
-            </a:endParaRPr>
-          </a:p>
-          <a:p>
-            <a:pPr marL="0" indent="0" algn="ctr">
-              <a:buNone/>
-            </a:pPr>
-            <a:r>
-              <a:rPr lang="zh-TW" altLang="en-US" sz="5400" b="1" dirty="0" smtClean="0">
-                <a:latin typeface="Microsoft JhengHei" panose="020B0604030504040204" pitchFamily="34" charset="-120"/>
-                <a:ea typeface="Microsoft JhengHei" panose="020B0604030504040204" pitchFamily="34" charset="-120"/>
-              </a:rPr>
-              <a:t>真</a:t>
-            </a:r>
-            <a:r>
-              <a:rPr lang="zh-TW" altLang="en-US" sz="5400" b="1" dirty="0">
-                <a:latin typeface="Microsoft JhengHei" panose="020B0604030504040204" pitchFamily="34" charset="-120"/>
-                <a:ea typeface="Microsoft JhengHei" panose="020B0604030504040204" pitchFamily="34" charset="-120"/>
-              </a:rPr>
-              <a:t>神恩典無限無</a:t>
-            </a:r>
-            <a:r>
-              <a:rPr lang="zh-TW" altLang="en-US" sz="5400" b="1" dirty="0" smtClean="0">
-                <a:latin typeface="Microsoft JhengHei" panose="020B0604030504040204" pitchFamily="34" charset="-120"/>
-                <a:ea typeface="Microsoft JhengHei" panose="020B0604030504040204" pitchFamily="34" charset="-120"/>
-              </a:rPr>
-              <a:t>量</a:t>
-            </a:r>
-            <a:endParaRPr lang="vi-VN" sz="5400" b="1" dirty="0">
-              <a:ea typeface="Microsoft JhengHei" panose="020B0604030504040204" pitchFamily="34" charset="-120"/>
-            </a:endParaRPr>
           </a:p>
         </p:txBody>
       </p:sp>
     </p:spTree>
     <p:extLst>
       <p:ext uri="{BB962C8B-B14F-4D97-AF65-F5344CB8AC3E}">
-        <p14:creationId xmlns:p14="http://schemas.microsoft.com/office/powerpoint/2010/main" val="1005470218"/>
+        <p14:creationId xmlns:p14="http://schemas.microsoft.com/office/powerpoint/2010/main" val="3724263107"/>
       </p:ext>
     </p:extLst>
   </p:cSld>
@@ -3299,154 +3273,92 @@
       </p:grpSpPr>
       <p:sp>
         <p:nvSpPr>
-          <p:cNvPr id="2" name="Title 1"/>
-          <p:cNvSpPr>
-            <a:spLocks noGrp="1"/>
-          </p:cNvSpPr>
-          <p:nvPr>
-            <p:ph type="title"/>
-          </p:nvPr>
-        </p:nvSpPr>
-        <p:spPr/>
-        <p:txBody>
-          <a:bodyPr>
+          <p:cNvPr id="5" name="內容版面配置區 4"/>
+          <p:cNvSpPr>
+            <a:spLocks noGrp="1"/>
+          </p:cNvSpPr>
+          <p:nvPr>
+            <p:ph idx="1"/>
+          </p:nvPr>
+        </p:nvSpPr>
+        <p:spPr>
+          <a:xfrm>
+            <a:off x="0" y="2084851"/>
+            <a:ext cx="12192000" cy="2404863"/>
+          </a:xfrm>
+        </p:spPr>
+        <p:txBody>
+          <a:bodyPr anchor="ctr">
             <a:normAutofit/>
           </a:bodyPr>
           <a:lstStyle/>
           <a:p>
-            <a:r>
-              <a:rPr lang="zh-CN" altLang="en-US" sz="4800" b="1" dirty="0" smtClean="0">
-                <a:latin typeface="Microsoft JhengHei" panose="020B0604030504040204" pitchFamily="34" charset="-120"/>
-                <a:ea typeface="Microsoft JhengHei" panose="020B0604030504040204" pitchFamily="34" charset="-120"/>
+            <a:pPr marL="0" indent="0" algn="ctr">
+              <a:buNone/>
+            </a:pPr>
+            <a:r>
+              <a:rPr lang="zh-TW" altLang="en-US" sz="6400" b="1" dirty="0">
+                <a:solidFill>
+                  <a:srgbClr val="660033"/>
+                </a:solidFill>
+                <a:latin typeface="Microsoft JhengHei" pitchFamily="34" charset="-120"/>
+                <a:ea typeface="Microsoft JhengHei" pitchFamily="34" charset="-120"/>
               </a:rPr>
-              <a:t>神的恩典</a:t>
-            </a:r>
-            <a:endParaRPr lang="vi-VN" sz="4800" b="1" dirty="0">
-              <a:ea typeface="Microsoft JhengHei" panose="020B0604030504040204" pitchFamily="34" charset="-120"/>
-            </a:endParaRPr>
-          </a:p>
-        </p:txBody>
-      </p:sp>
-      <p:sp>
-        <p:nvSpPr>
-          <p:cNvPr id="3" name="Content Placeholder 2"/>
-          <p:cNvSpPr>
-            <a:spLocks noGrp="1"/>
-          </p:cNvSpPr>
-          <p:nvPr>
-            <p:ph idx="1"/>
-          </p:nvPr>
-        </p:nvSpPr>
-        <p:spPr/>
-        <p:txBody>
-          <a:bodyPr>
-            <a:normAutofit/>
+              <a:t>真神恩典遠高過諸天</a:t>
+            </a:r>
+          </a:p>
+          <a:p>
+            <a:pPr marL="0" indent="0" algn="ctr">
+              <a:buNone/>
+            </a:pPr>
+            <a:r>
+              <a:rPr lang="zh-TW" altLang="en-US" sz="6400" b="1" dirty="0">
+                <a:solidFill>
+                  <a:srgbClr val="660033"/>
+                </a:solidFill>
+                <a:latin typeface="Microsoft JhengHei" pitchFamily="34" charset="-120"/>
+                <a:ea typeface="Microsoft JhengHei" pitchFamily="34" charset="-120"/>
+              </a:rPr>
+              <a:t>真神恩典深過海洋</a:t>
+            </a:r>
+          </a:p>
+        </p:txBody>
+      </p:sp>
+      <p:sp>
+        <p:nvSpPr>
+          <p:cNvPr id="3" name="TextBox 2"/>
+          <p:cNvSpPr txBox="1"/>
+          <p:nvPr/>
+        </p:nvSpPr>
+        <p:spPr>
+          <a:xfrm>
+            <a:off x="0" y="5061182"/>
+            <a:ext cx="12192000" cy="646331"/>
+          </a:xfrm>
+          <a:prstGeom prst="rect">
+            <a:avLst/>
+          </a:prstGeom>
+          <a:noFill/>
+        </p:spPr>
+        <p:txBody>
+          <a:bodyPr wrap="square" rtlCol="0">
+            <a:spAutoFit/>
           </a:bodyPr>
           <a:lstStyle/>
           <a:p>
-            <a:pPr marL="0" indent="0" algn="ctr">
-              <a:buNone/>
-            </a:pPr>
-            <a:r>
-              <a:rPr lang="zh-TW" altLang="en-US" sz="5400" b="1" dirty="0">
-                <a:latin typeface="Microsoft JhengHei" panose="020B0604030504040204" pitchFamily="34" charset="-120"/>
-                <a:ea typeface="Microsoft JhengHei" panose="020B0604030504040204" pitchFamily="34" charset="-120"/>
+            <a:pPr algn="ctr"/>
+            <a:r>
+              <a:rPr lang="en-US" sz="3600" b="1" dirty="0">
+                <a:solidFill>
+                  <a:srgbClr val="660033"/>
+                </a:solidFill>
               </a:rPr>
-              <a:t>真神恩</a:t>
-            </a:r>
-            <a:r>
-              <a:rPr lang="zh-TW" altLang="en-US" sz="5400" b="1" dirty="0">
-                <a:latin typeface="Microsoft JhengHei" panose="020B0604030504040204" pitchFamily="34" charset="-120"/>
-                <a:ea typeface="Microsoft JhengHei" panose="020B0604030504040204" pitchFamily="34" charset="-120"/>
-              </a:rPr>
-              <a:t>典</a:t>
-            </a:r>
-            <a:endParaRPr lang="en-US" altLang="zh-TW" sz="5400" b="1" dirty="0">
-              <a:latin typeface="Microsoft JhengHei" panose="020B0604030504040204" pitchFamily="34" charset="-120"/>
-              <a:ea typeface="Microsoft JhengHei" panose="020B0604030504040204" pitchFamily="34" charset="-120"/>
-            </a:endParaRPr>
-          </a:p>
-          <a:p>
-            <a:pPr marL="0" indent="0" algn="ctr">
-              <a:buNone/>
-            </a:pPr>
-            <a:r>
-              <a:rPr lang="zh-TW" altLang="en-US" sz="5400" b="1" dirty="0">
-                <a:latin typeface="Microsoft JhengHei" panose="020B0604030504040204" pitchFamily="34" charset="-120"/>
-                <a:ea typeface="Microsoft JhengHei" panose="020B0604030504040204" pitchFamily="34" charset="-120"/>
-              </a:rPr>
-              <a:t>真</a:t>
-            </a:r>
-            <a:r>
-              <a:rPr lang="zh-TW" altLang="en-US" sz="5400" b="1" dirty="0">
-                <a:latin typeface="Microsoft JhengHei" panose="020B0604030504040204" pitchFamily="34" charset="-120"/>
-                <a:ea typeface="Microsoft JhengHei" panose="020B0604030504040204" pitchFamily="34" charset="-120"/>
-              </a:rPr>
-              <a:t>神的恩典無限無</a:t>
-            </a:r>
-            <a:r>
-              <a:rPr lang="zh-TW" altLang="en-US" sz="5400" b="1" dirty="0">
-                <a:latin typeface="Microsoft JhengHei" panose="020B0604030504040204" pitchFamily="34" charset="-120"/>
-                <a:ea typeface="Microsoft JhengHei" panose="020B0604030504040204" pitchFamily="34" charset="-120"/>
-              </a:rPr>
-              <a:t>量</a:t>
-            </a:r>
-            <a:endParaRPr lang="en-US" altLang="zh-TW" sz="5400" b="1" dirty="0">
-              <a:latin typeface="Microsoft JhengHei" panose="020B0604030504040204" pitchFamily="34" charset="-120"/>
-              <a:ea typeface="Microsoft JhengHei" panose="020B0604030504040204" pitchFamily="34" charset="-120"/>
-            </a:endParaRPr>
-          </a:p>
-          <a:p>
-            <a:pPr marL="0" indent="0" algn="ctr">
-              <a:buNone/>
-            </a:pPr>
-            <a:r>
-              <a:rPr lang="zh-TW" altLang="en-US" sz="5400" b="1" dirty="0">
-                <a:latin typeface="Microsoft JhengHei" panose="020B0604030504040204" pitchFamily="34" charset="-120"/>
-                <a:ea typeface="Microsoft JhengHei" panose="020B0604030504040204" pitchFamily="34" charset="-120"/>
-              </a:rPr>
-              <a:t>真</a:t>
-            </a:r>
-            <a:r>
-              <a:rPr lang="zh-TW" altLang="en-US" sz="5400" b="1" dirty="0">
-                <a:latin typeface="Microsoft JhengHei" panose="020B0604030504040204" pitchFamily="34" charset="-120"/>
-                <a:ea typeface="Microsoft JhengHei" panose="020B0604030504040204" pitchFamily="34" charset="-120"/>
-              </a:rPr>
-              <a:t>神恩</a:t>
-            </a:r>
-            <a:r>
-              <a:rPr lang="zh-TW" altLang="en-US" sz="5400" b="1" dirty="0">
-                <a:latin typeface="Microsoft JhengHei" panose="020B0604030504040204" pitchFamily="34" charset="-120"/>
-                <a:ea typeface="Microsoft JhengHei" panose="020B0604030504040204" pitchFamily="34" charset="-120"/>
-              </a:rPr>
-              <a:t>典</a:t>
-            </a:r>
-            <a:endParaRPr lang="en-US" altLang="zh-TW" sz="5400" b="1" dirty="0">
-              <a:latin typeface="Microsoft JhengHei" panose="020B0604030504040204" pitchFamily="34" charset="-120"/>
-              <a:ea typeface="Microsoft JhengHei" panose="020B0604030504040204" pitchFamily="34" charset="-120"/>
-            </a:endParaRPr>
-          </a:p>
-          <a:p>
-            <a:pPr marL="0" indent="0" algn="ctr">
-              <a:buNone/>
-            </a:pPr>
-            <a:r>
-              <a:rPr lang="zh-TW" altLang="en-US" sz="5400" b="1" dirty="0">
-                <a:latin typeface="Microsoft JhengHei" panose="020B0604030504040204" pitchFamily="34" charset="-120"/>
-                <a:ea typeface="Microsoft JhengHei" panose="020B0604030504040204" pitchFamily="34" charset="-120"/>
-              </a:rPr>
-              <a:t>真</a:t>
-            </a:r>
-            <a:r>
-              <a:rPr lang="zh-TW" altLang="en-US" sz="5400" b="1" dirty="0">
-                <a:latin typeface="Microsoft JhengHei" panose="020B0604030504040204" pitchFamily="34" charset="-120"/>
-                <a:ea typeface="Microsoft JhengHei" panose="020B0604030504040204" pitchFamily="34" charset="-120"/>
-              </a:rPr>
-              <a:t>神恩典無限無量</a:t>
-            </a:r>
-            <a:endParaRPr lang="vi-VN" sz="5400" b="1" dirty="0">
-              <a:latin typeface="Microsoft JhengHei" panose="020B0604030504040204" pitchFamily="34" charset="-120"/>
-              <a:ea typeface="Microsoft JhengHei" panose="020B0604030504040204" pitchFamily="34" charset="-120"/>
+              <a:t>( 1 / 2 )</a:t>
+            </a:r>
+            <a:endParaRPr lang="vi-VN" sz="3600" b="1" dirty="0">
+              <a:solidFill>
+                <a:srgbClr val="660033"/>
+              </a:solidFill>
             </a:endParaRPr>
           </a:p>
         </p:txBody>
@@ -3454,7 +3366,7 @@
     </p:spTree>
     <p:extLst>
       <p:ext uri="{BB962C8B-B14F-4D97-AF65-F5344CB8AC3E}">
-        <p14:creationId xmlns:p14="http://schemas.microsoft.com/office/powerpoint/2010/main" val="2368883626"/>
+        <p14:creationId xmlns:p14="http://schemas.microsoft.com/office/powerpoint/2010/main" val="1407003638"/>
       </p:ext>
     </p:extLst>
   </p:cSld>
@@ -3469,7 +3381,13 @@
   <p:cSld>
     <p:spTree>
       <p:nvGrpSpPr>
-        <p:cNvPr id="1" name=""/>
+        <p:cNvPr id="1" name="">
+          <a:extLst>
+            <a:ext uri="{FF2B5EF4-FFF2-40B4-BE49-F238E27FC236}">
+              <a16:creationId xmlns:a16="http://schemas.microsoft.com/office/drawing/2014/main" id="{C47D8C2A-D773-A66A-251D-7E902735180E}"/>
+            </a:ext>
+          </a:extLst>
+        </p:cNvPr>
         <p:cNvGrpSpPr/>
         <p:nvPr/>
       </p:nvGrpSpPr>
@@ -3483,154 +3401,104 @@
       </p:grpSpPr>
       <p:sp>
         <p:nvSpPr>
-          <p:cNvPr id="2" name="Title 1"/>
-          <p:cNvSpPr>
-            <a:spLocks noGrp="1"/>
-          </p:cNvSpPr>
-          <p:nvPr>
-            <p:ph type="title"/>
-          </p:nvPr>
-        </p:nvSpPr>
-        <p:spPr/>
-        <p:txBody>
-          <a:bodyPr>
+          <p:cNvPr id="5" name="內容版面配置區 4">
+            <a:extLst>
+              <a:ext uri="{FF2B5EF4-FFF2-40B4-BE49-F238E27FC236}">
+                <a16:creationId xmlns:a16="http://schemas.microsoft.com/office/drawing/2014/main" id="{649B6598-F5D8-9005-133D-C41D5259DED0}"/>
+              </a:ext>
+            </a:extLst>
+          </p:cNvPr>
+          <p:cNvSpPr>
+            <a:spLocks noGrp="1"/>
+          </p:cNvSpPr>
+          <p:nvPr>
+            <p:ph idx="1"/>
+          </p:nvPr>
+        </p:nvSpPr>
+        <p:spPr>
+          <a:xfrm>
+            <a:off x="0" y="2084851"/>
+            <a:ext cx="12192000" cy="2404863"/>
+          </a:xfrm>
+        </p:spPr>
+        <p:txBody>
+          <a:bodyPr anchor="ctr">
             <a:normAutofit/>
           </a:bodyPr>
           <a:lstStyle/>
           <a:p>
-            <a:r>
-              <a:rPr lang="zh-CN" altLang="en-US" sz="4800" b="1" dirty="0" smtClean="0">
-                <a:latin typeface="Microsoft JhengHei" panose="020B0604030504040204" pitchFamily="34" charset="-120"/>
-                <a:ea typeface="Microsoft JhengHei" panose="020B0604030504040204" pitchFamily="34" charset="-120"/>
+            <a:pPr marL="0" indent="0" algn="ctr">
+              <a:buNone/>
+            </a:pPr>
+            <a:r>
+              <a:rPr lang="zh-TW" altLang="en-US" sz="6400" b="1" dirty="0">
+                <a:solidFill>
+                  <a:srgbClr val="660033"/>
+                </a:solidFill>
+                <a:latin typeface="Microsoft JhengHei" pitchFamily="34" charset="-120"/>
+                <a:ea typeface="Microsoft JhengHei" pitchFamily="34" charset="-120"/>
               </a:rPr>
-              <a:t>神的恩典</a:t>
-            </a:r>
-            <a:endParaRPr lang="vi-VN" sz="4800" b="1" dirty="0">
-              <a:ea typeface="Microsoft JhengHei" panose="020B0604030504040204" pitchFamily="34" charset="-120"/>
-            </a:endParaRPr>
-          </a:p>
-        </p:txBody>
-      </p:sp>
-      <p:sp>
-        <p:nvSpPr>
-          <p:cNvPr id="3" name="Content Placeholder 2"/>
-          <p:cNvSpPr>
-            <a:spLocks noGrp="1"/>
-          </p:cNvSpPr>
-          <p:nvPr>
-            <p:ph idx="1"/>
-          </p:nvPr>
-        </p:nvSpPr>
-        <p:spPr/>
-        <p:txBody>
-          <a:bodyPr>
-            <a:normAutofit/>
+              <a:t>真神恩典闊過大洋海</a:t>
+            </a:r>
+          </a:p>
+          <a:p>
+            <a:pPr marL="0" indent="0" algn="ctr">
+              <a:buNone/>
+            </a:pPr>
+            <a:r>
+              <a:rPr lang="zh-TW" altLang="en-US" sz="6400" b="1" dirty="0">
+                <a:solidFill>
+                  <a:srgbClr val="660033"/>
+                </a:solidFill>
+                <a:latin typeface="Microsoft JhengHei" pitchFamily="34" charset="-120"/>
+                <a:ea typeface="Microsoft JhengHei" pitchFamily="34" charset="-120"/>
+              </a:rPr>
+              <a:t>真神恩典無限無量</a:t>
+            </a:r>
+          </a:p>
+        </p:txBody>
+      </p:sp>
+      <p:sp>
+        <p:nvSpPr>
+          <p:cNvPr id="3" name="TextBox 2">
+            <a:extLst>
+              <a:ext uri="{FF2B5EF4-FFF2-40B4-BE49-F238E27FC236}">
+                <a16:creationId xmlns:a16="http://schemas.microsoft.com/office/drawing/2014/main" id="{1BA1DBC0-24F8-76A9-1C81-84B67730C501}"/>
+              </a:ext>
+            </a:extLst>
+          </p:cNvPr>
+          <p:cNvSpPr txBox="1"/>
+          <p:nvPr/>
+        </p:nvSpPr>
+        <p:spPr>
+          <a:xfrm>
+            <a:off x="0" y="5061182"/>
+            <a:ext cx="12192000" cy="646331"/>
+          </a:xfrm>
+          <a:prstGeom prst="rect">
+            <a:avLst/>
+          </a:prstGeom>
+          <a:noFill/>
+        </p:spPr>
+        <p:txBody>
+          <a:bodyPr wrap="square" rtlCol="0">
+            <a:spAutoFit/>
           </a:bodyPr>
           <a:lstStyle/>
           <a:p>
-            <a:pPr marL="0" indent="0" algn="ctr">
-              <a:buNone/>
-            </a:pPr>
-            <a:r>
-              <a:rPr lang="zh-TW" altLang="en-US" sz="5400" b="1" dirty="0">
-                <a:latin typeface="Microsoft JhengHei" panose="020B0604030504040204" pitchFamily="34" charset="-120"/>
-                <a:ea typeface="Microsoft JhengHei" panose="020B0604030504040204" pitchFamily="34" charset="-120"/>
+            <a:pPr algn="ctr"/>
+            <a:r>
+              <a:rPr lang="en-US" sz="3600" b="1" dirty="0">
+                <a:solidFill>
+                  <a:srgbClr val="660033"/>
+                </a:solidFill>
               </a:rPr>
-              <a:t>真神恩典得聞真快</a:t>
-            </a:r>
-            <a:r>
-              <a:rPr lang="zh-TW" altLang="en-US" sz="5400" b="1" dirty="0">
-                <a:latin typeface="Microsoft JhengHei" panose="020B0604030504040204" pitchFamily="34" charset="-120"/>
-                <a:ea typeface="Microsoft JhengHei" panose="020B0604030504040204" pitchFamily="34" charset="-120"/>
-              </a:rPr>
-              <a:t>樂</a:t>
-            </a:r>
-            <a:endParaRPr lang="en-US" altLang="zh-TW" sz="5400" b="1" dirty="0">
-              <a:latin typeface="Microsoft JhengHei" panose="020B0604030504040204" pitchFamily="34" charset="-120"/>
-              <a:ea typeface="Microsoft JhengHei" panose="020B0604030504040204" pitchFamily="34" charset="-120"/>
-            </a:endParaRPr>
-          </a:p>
-          <a:p>
-            <a:pPr marL="0" indent="0" algn="ctr">
-              <a:buNone/>
-            </a:pPr>
-            <a:r>
-              <a:rPr lang="zh-TW" altLang="en-US" sz="5400" b="1" dirty="0">
-                <a:latin typeface="Microsoft JhengHei" panose="020B0604030504040204" pitchFamily="34" charset="-120"/>
-                <a:ea typeface="Microsoft JhengHei" panose="020B0604030504040204" pitchFamily="34" charset="-120"/>
-              </a:rPr>
-              <a:t>真</a:t>
-            </a:r>
-            <a:r>
-              <a:rPr lang="zh-TW" altLang="en-US" sz="5400" b="1" dirty="0">
-                <a:latin typeface="Microsoft JhengHei" panose="020B0604030504040204" pitchFamily="34" charset="-120"/>
-                <a:ea typeface="Microsoft JhengHei" panose="020B0604030504040204" pitchFamily="34" charset="-120"/>
-              </a:rPr>
-              <a:t>神恩典豐富自</a:t>
-            </a:r>
-            <a:r>
-              <a:rPr lang="zh-TW" altLang="en-US" sz="5400" b="1" dirty="0">
-                <a:latin typeface="Microsoft JhengHei" panose="020B0604030504040204" pitchFamily="34" charset="-120"/>
-                <a:ea typeface="Microsoft JhengHei" panose="020B0604030504040204" pitchFamily="34" charset="-120"/>
-              </a:rPr>
-              <a:t>由</a:t>
-            </a:r>
-            <a:endParaRPr lang="en-US" altLang="zh-TW" sz="5400" b="1" dirty="0">
-              <a:latin typeface="Microsoft JhengHei" panose="020B0604030504040204" pitchFamily="34" charset="-120"/>
-              <a:ea typeface="Microsoft JhengHei" panose="020B0604030504040204" pitchFamily="34" charset="-120"/>
-            </a:endParaRPr>
-          </a:p>
-          <a:p>
-            <a:pPr marL="0" indent="0" algn="ctr">
-              <a:buNone/>
-            </a:pPr>
-            <a:r>
-              <a:rPr lang="zh-TW" altLang="en-US" sz="5400" b="1" dirty="0">
-                <a:latin typeface="Microsoft JhengHei" panose="020B0604030504040204" pitchFamily="34" charset="-120"/>
-                <a:ea typeface="Microsoft JhengHei" panose="020B0604030504040204" pitchFamily="34" charset="-120"/>
-              </a:rPr>
-              <a:t>真</a:t>
-            </a:r>
-            <a:r>
-              <a:rPr lang="zh-TW" altLang="en-US" sz="5400" b="1" dirty="0">
-                <a:latin typeface="Microsoft JhengHei" panose="020B0604030504040204" pitchFamily="34" charset="-120"/>
-                <a:ea typeface="Microsoft JhengHei" panose="020B0604030504040204" pitchFamily="34" charset="-120"/>
-              </a:rPr>
-              <a:t>神恩典非我的功</a:t>
-            </a:r>
-            <a:r>
-              <a:rPr lang="zh-TW" altLang="en-US" sz="5400" b="1" dirty="0">
-                <a:latin typeface="Microsoft JhengHei" panose="020B0604030504040204" pitchFamily="34" charset="-120"/>
-                <a:ea typeface="Microsoft JhengHei" panose="020B0604030504040204" pitchFamily="34" charset="-120"/>
-              </a:rPr>
-              <a:t>勞</a:t>
-            </a:r>
-            <a:endParaRPr lang="en-US" altLang="zh-TW" sz="5400" b="1" dirty="0">
-              <a:latin typeface="Microsoft JhengHei" panose="020B0604030504040204" pitchFamily="34" charset="-120"/>
-              <a:ea typeface="Microsoft JhengHei" panose="020B0604030504040204" pitchFamily="34" charset="-120"/>
-            </a:endParaRPr>
-          </a:p>
-          <a:p>
-            <a:pPr marL="0" indent="0" algn="ctr">
-              <a:buNone/>
-            </a:pPr>
-            <a:r>
-              <a:rPr lang="zh-TW" altLang="en-US" sz="5400" b="1" dirty="0">
-                <a:latin typeface="Microsoft JhengHei" panose="020B0604030504040204" pitchFamily="34" charset="-120"/>
-                <a:ea typeface="Microsoft JhengHei" panose="020B0604030504040204" pitchFamily="34" charset="-120"/>
-              </a:rPr>
-              <a:t>真</a:t>
-            </a:r>
-            <a:r>
-              <a:rPr lang="zh-TW" altLang="en-US" sz="5400" b="1" dirty="0">
-                <a:latin typeface="Microsoft JhengHei" panose="020B0604030504040204" pitchFamily="34" charset="-120"/>
-                <a:ea typeface="Microsoft JhengHei" panose="020B0604030504040204" pitchFamily="34" charset="-120"/>
-              </a:rPr>
-              <a:t>神恩典保守拯救</a:t>
-            </a:r>
-            <a:endParaRPr lang="vi-VN" sz="5400" b="1" dirty="0">
-              <a:latin typeface="Microsoft JhengHei" panose="020B0604030504040204" pitchFamily="34" charset="-120"/>
-              <a:ea typeface="Microsoft JhengHei" panose="020B0604030504040204" pitchFamily="34" charset="-120"/>
+              <a:t>( 1 / 2 )</a:t>
+            </a:r>
+            <a:endParaRPr lang="vi-VN" sz="3600" b="1" dirty="0">
+              <a:solidFill>
+                <a:srgbClr val="660033"/>
+              </a:solidFill>
             </a:endParaRPr>
           </a:p>
         </p:txBody>
@@ -3638,7 +3506,7 @@
     </p:spTree>
     <p:extLst>
       <p:ext uri="{BB962C8B-B14F-4D97-AF65-F5344CB8AC3E}">
-        <p14:creationId xmlns:p14="http://schemas.microsoft.com/office/powerpoint/2010/main" val="1477131810"/>
+        <p14:creationId xmlns:p14="http://schemas.microsoft.com/office/powerpoint/2010/main" val="3069200104"/>
       </p:ext>
     </p:extLst>
   </p:cSld>
@@ -3653,7 +3521,13 @@
   <p:cSld>
     <p:spTree>
       <p:nvGrpSpPr>
-        <p:cNvPr id="1" name=""/>
+        <p:cNvPr id="1" name="">
+          <a:extLst>
+            <a:ext uri="{FF2B5EF4-FFF2-40B4-BE49-F238E27FC236}">
+              <a16:creationId xmlns:a16="http://schemas.microsoft.com/office/drawing/2014/main" id="{B606060F-DB1A-C7A8-4E78-5B4E74C5333B}"/>
+            </a:ext>
+          </a:extLst>
+        </p:cNvPr>
         <p:cNvGrpSpPr/>
         <p:nvPr/>
       </p:nvGrpSpPr>
@@ -3667,162 +3541,632 @@
       </p:grpSpPr>
       <p:sp>
         <p:nvSpPr>
-          <p:cNvPr id="2" name="Title 1"/>
-          <p:cNvSpPr>
-            <a:spLocks noGrp="1"/>
-          </p:cNvSpPr>
-          <p:nvPr>
-            <p:ph type="title"/>
-          </p:nvPr>
-        </p:nvSpPr>
-        <p:spPr/>
-        <p:txBody>
-          <a:bodyPr>
+          <p:cNvPr id="5" name="內容版面配置區 4">
+            <a:extLst>
+              <a:ext uri="{FF2B5EF4-FFF2-40B4-BE49-F238E27FC236}">
+                <a16:creationId xmlns:a16="http://schemas.microsoft.com/office/drawing/2014/main" id="{E99AB4ED-0434-5726-8FB7-13B27748CD96}"/>
+              </a:ext>
+            </a:extLst>
+          </p:cNvPr>
+          <p:cNvSpPr>
+            <a:spLocks noGrp="1"/>
+          </p:cNvSpPr>
+          <p:nvPr>
+            <p:ph idx="1"/>
+          </p:nvPr>
+        </p:nvSpPr>
+        <p:spPr>
+          <a:xfrm>
+            <a:off x="0" y="2084851"/>
+            <a:ext cx="12192000" cy="2404863"/>
+          </a:xfrm>
+        </p:spPr>
+        <p:txBody>
+          <a:bodyPr anchor="ctr">
             <a:normAutofit/>
           </a:bodyPr>
           <a:lstStyle/>
           <a:p>
-            <a:r>
-              <a:rPr lang="zh-CN" altLang="en-US" sz="4800" b="1" dirty="0" smtClean="0">
-                <a:latin typeface="Microsoft JhengHei" panose="020B0604030504040204" pitchFamily="34" charset="-120"/>
-                <a:ea typeface="Microsoft JhengHei" panose="020B0604030504040204" pitchFamily="34" charset="-120"/>
+            <a:pPr marL="0" indent="0" algn="ctr">
+              <a:buNone/>
+            </a:pPr>
+            <a:r>
+              <a:rPr lang="zh-TW" altLang="en-US" sz="6400" b="1" dirty="0">
+                <a:solidFill>
+                  <a:srgbClr val="660033"/>
+                </a:solidFill>
+                <a:latin typeface="Microsoft JhengHei" pitchFamily="34" charset="-120"/>
+                <a:ea typeface="Microsoft JhengHei" pitchFamily="34" charset="-120"/>
               </a:rPr>
-              <a:t>神的恩典</a:t>
-            </a:r>
-            <a:endParaRPr lang="vi-VN" sz="4800" b="1" dirty="0">
-              <a:ea typeface="Microsoft JhengHei" panose="020B0604030504040204" pitchFamily="34" charset="-120"/>
-            </a:endParaRPr>
-          </a:p>
-        </p:txBody>
-      </p:sp>
-      <p:sp>
-        <p:nvSpPr>
-          <p:cNvPr id="3" name="Content Placeholder 2"/>
-          <p:cNvSpPr>
-            <a:spLocks noGrp="1"/>
-          </p:cNvSpPr>
-          <p:nvPr>
-            <p:ph idx="1"/>
-          </p:nvPr>
-        </p:nvSpPr>
-        <p:spPr/>
-        <p:txBody>
-          <a:bodyPr>
-            <a:normAutofit/>
-          </a:bodyPr>
-          <a:lstStyle/>
+              <a:t>真神恩典</a:t>
+            </a:r>
+          </a:p>
           <a:p>
             <a:pPr marL="0" indent="0" algn="ctr">
               <a:buNone/>
             </a:pPr>
             <a:r>
-              <a:rPr lang="zh-TW" altLang="en-US" sz="5400" b="1" dirty="0">
-                <a:latin typeface="Microsoft JhengHei" panose="020B0604030504040204" pitchFamily="34" charset="-120"/>
-                <a:ea typeface="Microsoft JhengHei" panose="020B0604030504040204" pitchFamily="34" charset="-120"/>
+              <a:rPr lang="zh-TW" altLang="en-US" sz="6400" b="1" dirty="0">
+                <a:solidFill>
+                  <a:srgbClr val="660033"/>
+                </a:solidFill>
+                <a:latin typeface="Microsoft JhengHei" pitchFamily="34" charset="-120"/>
+                <a:ea typeface="Microsoft JhengHei" pitchFamily="34" charset="-120"/>
               </a:rPr>
-              <a:t>真神恩</a:t>
-            </a:r>
-            <a:r>
-              <a:rPr lang="zh-TW" altLang="en-US" sz="5400" b="1" dirty="0">
-                <a:latin typeface="Microsoft JhengHei" panose="020B0604030504040204" pitchFamily="34" charset="-120"/>
-                <a:ea typeface="Microsoft JhengHei" panose="020B0604030504040204" pitchFamily="34" charset="-120"/>
-              </a:rPr>
-              <a:t>典</a:t>
-            </a:r>
-            <a:endParaRPr lang="en-US" altLang="zh-TW" sz="5400" b="1" dirty="0">
-              <a:latin typeface="Microsoft JhengHei" panose="020B0604030504040204" pitchFamily="34" charset="-120"/>
-              <a:ea typeface="Microsoft JhengHei" panose="020B0604030504040204" pitchFamily="34" charset="-120"/>
-            </a:endParaRPr>
-          </a:p>
-          <a:p>
-            <a:pPr marL="0" indent="0" algn="ctr">
-              <a:buNone/>
-            </a:pPr>
-            <a:r>
-              <a:rPr lang="zh-TW" altLang="en-US" sz="5400" b="1" dirty="0">
-                <a:latin typeface="Microsoft JhengHei" panose="020B0604030504040204" pitchFamily="34" charset="-120"/>
-                <a:ea typeface="Microsoft JhengHei" panose="020B0604030504040204" pitchFamily="34" charset="-120"/>
-              </a:rPr>
-              <a:t>真</a:t>
-            </a:r>
-            <a:r>
-              <a:rPr lang="zh-TW" altLang="en-US" sz="5400" b="1" dirty="0">
-                <a:latin typeface="Microsoft JhengHei" panose="020B0604030504040204" pitchFamily="34" charset="-120"/>
-                <a:ea typeface="Microsoft JhengHei" panose="020B0604030504040204" pitchFamily="34" charset="-120"/>
-              </a:rPr>
-              <a:t>神的恩典無限無</a:t>
-            </a:r>
-            <a:r>
-              <a:rPr lang="zh-TW" altLang="en-US" sz="5400" b="1" dirty="0">
-                <a:latin typeface="Microsoft JhengHei" panose="020B0604030504040204" pitchFamily="34" charset="-120"/>
-                <a:ea typeface="Microsoft JhengHei" panose="020B0604030504040204" pitchFamily="34" charset="-120"/>
-              </a:rPr>
-              <a:t>量</a:t>
-            </a:r>
-            <a:endParaRPr lang="en-US" altLang="zh-TW" sz="5400" b="1" dirty="0">
-              <a:latin typeface="Microsoft JhengHei" panose="020B0604030504040204" pitchFamily="34" charset="-120"/>
-              <a:ea typeface="Microsoft JhengHei" panose="020B0604030504040204" pitchFamily="34" charset="-120"/>
-            </a:endParaRPr>
-          </a:p>
-          <a:p>
-            <a:pPr marL="0" indent="0" algn="ctr">
-              <a:buNone/>
-            </a:pPr>
-            <a:r>
-              <a:rPr lang="zh-TW" altLang="en-US" sz="5400" b="1" dirty="0">
-                <a:latin typeface="Microsoft JhengHei" panose="020B0604030504040204" pitchFamily="34" charset="-120"/>
-                <a:ea typeface="Microsoft JhengHei" panose="020B0604030504040204" pitchFamily="34" charset="-120"/>
-              </a:rPr>
-              <a:t>真</a:t>
-            </a:r>
-            <a:r>
-              <a:rPr lang="zh-TW" altLang="en-US" sz="5400" b="1" dirty="0">
-                <a:latin typeface="Microsoft JhengHei" panose="020B0604030504040204" pitchFamily="34" charset="-120"/>
-                <a:ea typeface="Microsoft JhengHei" panose="020B0604030504040204" pitchFamily="34" charset="-120"/>
-              </a:rPr>
-              <a:t>神恩</a:t>
-            </a:r>
-            <a:r>
-              <a:rPr lang="zh-TW" altLang="en-US" sz="5400" b="1" dirty="0">
-                <a:latin typeface="Microsoft JhengHei" panose="020B0604030504040204" pitchFamily="34" charset="-120"/>
-                <a:ea typeface="Microsoft JhengHei" panose="020B0604030504040204" pitchFamily="34" charset="-120"/>
-              </a:rPr>
-              <a:t>典</a:t>
-            </a:r>
-            <a:endParaRPr lang="en-US" altLang="zh-TW" sz="5400" b="1" dirty="0">
-              <a:latin typeface="Microsoft JhengHei" panose="020B0604030504040204" pitchFamily="34" charset="-120"/>
-              <a:ea typeface="Microsoft JhengHei" panose="020B0604030504040204" pitchFamily="34" charset="-120"/>
-            </a:endParaRPr>
-          </a:p>
-          <a:p>
-            <a:pPr marL="0" indent="0" algn="ctr">
-              <a:buNone/>
-            </a:pPr>
-            <a:r>
-              <a:rPr lang="zh-TW" altLang="en-US" sz="5400" b="1" dirty="0">
-                <a:latin typeface="Microsoft JhengHei" panose="020B0604030504040204" pitchFamily="34" charset="-120"/>
-                <a:ea typeface="Microsoft JhengHei" panose="020B0604030504040204" pitchFamily="34" charset="-120"/>
-              </a:rPr>
-              <a:t>真</a:t>
-            </a:r>
-            <a:r>
-              <a:rPr lang="zh-TW" altLang="en-US" sz="5400" b="1" dirty="0">
-                <a:latin typeface="Microsoft JhengHei" panose="020B0604030504040204" pitchFamily="34" charset="-120"/>
-                <a:ea typeface="Microsoft JhengHei" panose="020B0604030504040204" pitchFamily="34" charset="-120"/>
-              </a:rPr>
-              <a:t>神恩典無限無量</a:t>
-            </a:r>
-            <a:endParaRPr lang="vi-VN" sz="5400" b="1" dirty="0">
-              <a:latin typeface="Microsoft JhengHei" panose="020B0604030504040204" pitchFamily="34" charset="-120"/>
-              <a:ea typeface="Microsoft JhengHei" panose="020B0604030504040204" pitchFamily="34" charset="-120"/>
-            </a:endParaRPr>
+              <a:t>真神的恩典無限無量</a:t>
+            </a:r>
           </a:p>
         </p:txBody>
       </p:sp>
     </p:spTree>
     <p:extLst>
       <p:ext uri="{BB962C8B-B14F-4D97-AF65-F5344CB8AC3E}">
-        <p14:creationId xmlns:p14="http://schemas.microsoft.com/office/powerpoint/2010/main" val="620297171"/>
+        <p14:creationId xmlns:p14="http://schemas.microsoft.com/office/powerpoint/2010/main" val="2043377181"/>
+      </p:ext>
+    </p:extLst>
+  </p:cSld>
+  <p:clrMapOvr>
+    <a:masterClrMapping/>
+  </p:clrMapOvr>
+</p:sld>
+</file>
+
+<file path=ppt/slides/slide5.xml><?xml version="1.0" encoding="utf-8"?>
+<p:sld xmlns:a="http://schemas.openxmlformats.org/drawingml/2006/main" xmlns:r="http://schemas.openxmlformats.org/officeDocument/2006/relationships" xmlns:p="http://schemas.openxmlformats.org/presentationml/2006/main">
+  <p:cSld>
+    <p:spTree>
+      <p:nvGrpSpPr>
+        <p:cNvPr id="1" name="">
+          <a:extLst>
+            <a:ext uri="{FF2B5EF4-FFF2-40B4-BE49-F238E27FC236}">
+              <a16:creationId xmlns:a16="http://schemas.microsoft.com/office/drawing/2014/main" id="{1DE229F5-646F-7429-EF23-634C04D58C0B}"/>
+            </a:ext>
+          </a:extLst>
+        </p:cNvPr>
+        <p:cNvGrpSpPr/>
+        <p:nvPr/>
+      </p:nvGrpSpPr>
+      <p:grpSpPr>
+        <a:xfrm>
+          <a:off x="0" y="0"/>
+          <a:ext cx="0" cy="0"/>
+          <a:chOff x="0" y="0"/>
+          <a:chExt cx="0" cy="0"/>
+        </a:xfrm>
+      </p:grpSpPr>
+      <p:sp>
+        <p:nvSpPr>
+          <p:cNvPr id="5" name="內容版面配置區 4">
+            <a:extLst>
+              <a:ext uri="{FF2B5EF4-FFF2-40B4-BE49-F238E27FC236}">
+                <a16:creationId xmlns:a16="http://schemas.microsoft.com/office/drawing/2014/main" id="{098B25DE-2466-9C08-6DCD-B59BE37ED3F1}"/>
+              </a:ext>
+            </a:extLst>
+          </p:cNvPr>
+          <p:cNvSpPr>
+            <a:spLocks noGrp="1"/>
+          </p:cNvSpPr>
+          <p:nvPr>
+            <p:ph idx="1"/>
+          </p:nvPr>
+        </p:nvSpPr>
+        <p:spPr>
+          <a:xfrm>
+            <a:off x="0" y="2084851"/>
+            <a:ext cx="12192000" cy="2404863"/>
+          </a:xfrm>
+        </p:spPr>
+        <p:txBody>
+          <a:bodyPr anchor="ctr">
+            <a:normAutofit/>
+          </a:bodyPr>
+          <a:lstStyle/>
+          <a:p>
+            <a:pPr marL="0" indent="0" algn="ctr">
+              <a:buNone/>
+            </a:pPr>
+            <a:r>
+              <a:rPr lang="zh-TW" altLang="en-US" sz="6400" b="1" dirty="0">
+                <a:solidFill>
+                  <a:srgbClr val="660033"/>
+                </a:solidFill>
+                <a:latin typeface="Microsoft JhengHei" pitchFamily="34" charset="-120"/>
+                <a:ea typeface="Microsoft JhengHei" pitchFamily="34" charset="-120"/>
+              </a:rPr>
+              <a:t>真神恩典</a:t>
+            </a:r>
+          </a:p>
+          <a:p>
+            <a:pPr marL="0" indent="0" algn="ctr">
+              <a:buNone/>
+            </a:pPr>
+            <a:r>
+              <a:rPr lang="zh-TW" altLang="en-US" sz="6400" b="1" dirty="0">
+                <a:solidFill>
+                  <a:srgbClr val="660033"/>
+                </a:solidFill>
+                <a:latin typeface="Microsoft JhengHei" pitchFamily="34" charset="-120"/>
+                <a:ea typeface="Microsoft JhengHei" pitchFamily="34" charset="-120"/>
+              </a:rPr>
+              <a:t>真神恩典無限無量</a:t>
+            </a:r>
+          </a:p>
+        </p:txBody>
+      </p:sp>
+    </p:spTree>
+    <p:extLst>
+      <p:ext uri="{BB962C8B-B14F-4D97-AF65-F5344CB8AC3E}">
+        <p14:creationId xmlns:p14="http://schemas.microsoft.com/office/powerpoint/2010/main" val="3203336137"/>
+      </p:ext>
+    </p:extLst>
+  </p:cSld>
+  <p:clrMapOvr>
+    <a:masterClrMapping/>
+  </p:clrMapOvr>
+</p:sld>
+</file>
+
+<file path=ppt/slides/slide6.xml><?xml version="1.0" encoding="utf-8"?>
+<p:sld xmlns:a="http://schemas.openxmlformats.org/drawingml/2006/main" xmlns:r="http://schemas.openxmlformats.org/officeDocument/2006/relationships" xmlns:p="http://schemas.openxmlformats.org/presentationml/2006/main">
+  <p:cSld>
+    <p:spTree>
+      <p:nvGrpSpPr>
+        <p:cNvPr id="1" name="">
+          <a:extLst>
+            <a:ext uri="{FF2B5EF4-FFF2-40B4-BE49-F238E27FC236}">
+              <a16:creationId xmlns:a16="http://schemas.microsoft.com/office/drawing/2014/main" id="{D29AD711-96FE-A612-3FC3-7487237814DF}"/>
+            </a:ext>
+          </a:extLst>
+        </p:cNvPr>
+        <p:cNvGrpSpPr/>
+        <p:nvPr/>
+      </p:nvGrpSpPr>
+      <p:grpSpPr>
+        <a:xfrm>
+          <a:off x="0" y="0"/>
+          <a:ext cx="0" cy="0"/>
+          <a:chOff x="0" y="0"/>
+          <a:chExt cx="0" cy="0"/>
+        </a:xfrm>
+      </p:grpSpPr>
+      <p:sp>
+        <p:nvSpPr>
+          <p:cNvPr id="5" name="內容版面配置區 4">
+            <a:extLst>
+              <a:ext uri="{FF2B5EF4-FFF2-40B4-BE49-F238E27FC236}">
+                <a16:creationId xmlns:a16="http://schemas.microsoft.com/office/drawing/2014/main" id="{C13E623F-8592-C6CA-06B8-3D8F1346E262}"/>
+              </a:ext>
+            </a:extLst>
+          </p:cNvPr>
+          <p:cNvSpPr>
+            <a:spLocks noGrp="1"/>
+          </p:cNvSpPr>
+          <p:nvPr>
+            <p:ph idx="1"/>
+          </p:nvPr>
+        </p:nvSpPr>
+        <p:spPr>
+          <a:xfrm>
+            <a:off x="0" y="2084851"/>
+            <a:ext cx="12192000" cy="2404863"/>
+          </a:xfrm>
+        </p:spPr>
+        <p:txBody>
+          <a:bodyPr anchor="ctr">
+            <a:normAutofit/>
+          </a:bodyPr>
+          <a:lstStyle/>
+          <a:p>
+            <a:pPr marL="0" indent="0" algn="ctr">
+              <a:buNone/>
+            </a:pPr>
+            <a:r>
+              <a:rPr lang="zh-TW" altLang="en-US" sz="6400" b="1" dirty="0">
+                <a:solidFill>
+                  <a:srgbClr val="660033"/>
+                </a:solidFill>
+                <a:latin typeface="Microsoft JhengHei" pitchFamily="34" charset="-120"/>
+                <a:ea typeface="Microsoft JhengHei" pitchFamily="34" charset="-120"/>
+              </a:rPr>
+              <a:t>真神恩典得聞真快樂</a:t>
+            </a:r>
+          </a:p>
+          <a:p>
+            <a:pPr marL="0" indent="0" algn="ctr">
+              <a:buNone/>
+            </a:pPr>
+            <a:r>
+              <a:rPr lang="zh-TW" altLang="en-US" sz="6400" b="1" dirty="0">
+                <a:solidFill>
+                  <a:srgbClr val="660033"/>
+                </a:solidFill>
+                <a:latin typeface="Microsoft JhengHei" pitchFamily="34" charset="-120"/>
+                <a:ea typeface="Microsoft JhengHei" pitchFamily="34" charset="-120"/>
+              </a:rPr>
+              <a:t>真神恩典豐富自由</a:t>
+            </a:r>
+          </a:p>
+        </p:txBody>
+      </p:sp>
+      <p:sp>
+        <p:nvSpPr>
+          <p:cNvPr id="3" name="TextBox 2">
+            <a:extLst>
+              <a:ext uri="{FF2B5EF4-FFF2-40B4-BE49-F238E27FC236}">
+                <a16:creationId xmlns:a16="http://schemas.microsoft.com/office/drawing/2014/main" id="{92AFA46B-0CAD-B871-5C00-B1275101B935}"/>
+              </a:ext>
+            </a:extLst>
+          </p:cNvPr>
+          <p:cNvSpPr txBox="1"/>
+          <p:nvPr/>
+        </p:nvSpPr>
+        <p:spPr>
+          <a:xfrm>
+            <a:off x="0" y="5061182"/>
+            <a:ext cx="12192000" cy="646331"/>
+          </a:xfrm>
+          <a:prstGeom prst="rect">
+            <a:avLst/>
+          </a:prstGeom>
+          <a:noFill/>
+        </p:spPr>
+        <p:txBody>
+          <a:bodyPr wrap="square" rtlCol="0">
+            <a:spAutoFit/>
+          </a:bodyPr>
+          <a:lstStyle/>
+          <a:p>
+            <a:pPr algn="ctr"/>
+            <a:r>
+              <a:rPr lang="en-US" sz="3600" b="1" dirty="0">
+                <a:solidFill>
+                  <a:srgbClr val="660033"/>
+                </a:solidFill>
+              </a:rPr>
+              <a:t>( 2 / 2 )</a:t>
+            </a:r>
+            <a:endParaRPr lang="vi-VN" sz="3600" b="1" dirty="0">
+              <a:solidFill>
+                <a:srgbClr val="660033"/>
+              </a:solidFill>
+            </a:endParaRPr>
+          </a:p>
+        </p:txBody>
+      </p:sp>
+    </p:spTree>
+    <p:extLst>
+      <p:ext uri="{BB962C8B-B14F-4D97-AF65-F5344CB8AC3E}">
+        <p14:creationId xmlns:p14="http://schemas.microsoft.com/office/powerpoint/2010/main" val="1978840947"/>
+      </p:ext>
+    </p:extLst>
+  </p:cSld>
+  <p:clrMapOvr>
+    <a:masterClrMapping/>
+  </p:clrMapOvr>
+</p:sld>
+</file>
+
+<file path=ppt/slides/slide7.xml><?xml version="1.0" encoding="utf-8"?>
+<p:sld xmlns:a="http://schemas.openxmlformats.org/drawingml/2006/main" xmlns:r="http://schemas.openxmlformats.org/officeDocument/2006/relationships" xmlns:p="http://schemas.openxmlformats.org/presentationml/2006/main">
+  <p:cSld>
+    <p:spTree>
+      <p:nvGrpSpPr>
+        <p:cNvPr id="1" name="">
+          <a:extLst>
+            <a:ext uri="{FF2B5EF4-FFF2-40B4-BE49-F238E27FC236}">
+              <a16:creationId xmlns:a16="http://schemas.microsoft.com/office/drawing/2014/main" id="{6A54A4F5-A94B-F407-DA0E-8971BC5F2659}"/>
+            </a:ext>
+          </a:extLst>
+        </p:cNvPr>
+        <p:cNvGrpSpPr/>
+        <p:nvPr/>
+      </p:nvGrpSpPr>
+      <p:grpSpPr>
+        <a:xfrm>
+          <a:off x="0" y="0"/>
+          <a:ext cx="0" cy="0"/>
+          <a:chOff x="0" y="0"/>
+          <a:chExt cx="0" cy="0"/>
+        </a:xfrm>
+      </p:grpSpPr>
+      <p:sp>
+        <p:nvSpPr>
+          <p:cNvPr id="5" name="內容版面配置區 4">
+            <a:extLst>
+              <a:ext uri="{FF2B5EF4-FFF2-40B4-BE49-F238E27FC236}">
+                <a16:creationId xmlns:a16="http://schemas.microsoft.com/office/drawing/2014/main" id="{0371CFAE-C7B4-022C-9B20-967918B5F24E}"/>
+              </a:ext>
+            </a:extLst>
+          </p:cNvPr>
+          <p:cNvSpPr>
+            <a:spLocks noGrp="1"/>
+          </p:cNvSpPr>
+          <p:nvPr>
+            <p:ph idx="1"/>
+          </p:nvPr>
+        </p:nvSpPr>
+        <p:spPr>
+          <a:xfrm>
+            <a:off x="0" y="2084851"/>
+            <a:ext cx="12192000" cy="2404863"/>
+          </a:xfrm>
+        </p:spPr>
+        <p:txBody>
+          <a:bodyPr anchor="ctr">
+            <a:normAutofit/>
+          </a:bodyPr>
+          <a:lstStyle/>
+          <a:p>
+            <a:pPr marL="0" indent="0" algn="ctr">
+              <a:buNone/>
+            </a:pPr>
+            <a:r>
+              <a:rPr lang="zh-TW" altLang="en-US" sz="6400" b="1" dirty="0">
+                <a:solidFill>
+                  <a:srgbClr val="660033"/>
+                </a:solidFill>
+                <a:latin typeface="Microsoft JhengHei" pitchFamily="34" charset="-120"/>
+                <a:ea typeface="Microsoft JhengHei" pitchFamily="34" charset="-120"/>
+              </a:rPr>
+              <a:t>真神恩典非我的功勞</a:t>
+            </a:r>
+          </a:p>
+          <a:p>
+            <a:pPr marL="0" indent="0" algn="ctr">
+              <a:buNone/>
+            </a:pPr>
+            <a:r>
+              <a:rPr lang="zh-TW" altLang="en-US" sz="6400" b="1" dirty="0">
+                <a:solidFill>
+                  <a:srgbClr val="660033"/>
+                </a:solidFill>
+                <a:latin typeface="Microsoft JhengHei" pitchFamily="34" charset="-120"/>
+                <a:ea typeface="Microsoft JhengHei" pitchFamily="34" charset="-120"/>
+              </a:rPr>
+              <a:t>真神恩典保守拯救</a:t>
+            </a:r>
+          </a:p>
+        </p:txBody>
+      </p:sp>
+      <p:sp>
+        <p:nvSpPr>
+          <p:cNvPr id="3" name="TextBox 2">
+            <a:extLst>
+              <a:ext uri="{FF2B5EF4-FFF2-40B4-BE49-F238E27FC236}">
+                <a16:creationId xmlns:a16="http://schemas.microsoft.com/office/drawing/2014/main" id="{F63089B5-4263-205E-880E-75866719BEF3}"/>
+              </a:ext>
+            </a:extLst>
+          </p:cNvPr>
+          <p:cNvSpPr txBox="1"/>
+          <p:nvPr/>
+        </p:nvSpPr>
+        <p:spPr>
+          <a:xfrm>
+            <a:off x="0" y="5061182"/>
+            <a:ext cx="12192000" cy="646331"/>
+          </a:xfrm>
+          <a:prstGeom prst="rect">
+            <a:avLst/>
+          </a:prstGeom>
+          <a:noFill/>
+        </p:spPr>
+        <p:txBody>
+          <a:bodyPr wrap="square" rtlCol="0">
+            <a:spAutoFit/>
+          </a:bodyPr>
+          <a:lstStyle/>
+          <a:p>
+            <a:pPr algn="ctr"/>
+            <a:r>
+              <a:rPr lang="en-US" sz="3600" b="1" dirty="0">
+                <a:solidFill>
+                  <a:srgbClr val="660033"/>
+                </a:solidFill>
+              </a:rPr>
+              <a:t>( 2 / 2 )</a:t>
+            </a:r>
+            <a:endParaRPr lang="vi-VN" sz="3600" b="1" dirty="0">
+              <a:solidFill>
+                <a:srgbClr val="660033"/>
+              </a:solidFill>
+            </a:endParaRPr>
+          </a:p>
+        </p:txBody>
+      </p:sp>
+    </p:spTree>
+    <p:extLst>
+      <p:ext uri="{BB962C8B-B14F-4D97-AF65-F5344CB8AC3E}">
+        <p14:creationId xmlns:p14="http://schemas.microsoft.com/office/powerpoint/2010/main" val="2401280800"/>
+      </p:ext>
+    </p:extLst>
+  </p:cSld>
+  <p:clrMapOvr>
+    <a:masterClrMapping/>
+  </p:clrMapOvr>
+</p:sld>
+</file>
+
+<file path=ppt/slides/slide8.xml><?xml version="1.0" encoding="utf-8"?>
+<p:sld xmlns:a="http://schemas.openxmlformats.org/drawingml/2006/main" xmlns:r="http://schemas.openxmlformats.org/officeDocument/2006/relationships" xmlns:p="http://schemas.openxmlformats.org/presentationml/2006/main">
+  <p:cSld>
+    <p:spTree>
+      <p:nvGrpSpPr>
+        <p:cNvPr id="1" name="">
+          <a:extLst>
+            <a:ext uri="{FF2B5EF4-FFF2-40B4-BE49-F238E27FC236}">
+              <a16:creationId xmlns:a16="http://schemas.microsoft.com/office/drawing/2014/main" id="{C23898D8-D3DB-C390-3F74-22B3A27701D5}"/>
+            </a:ext>
+          </a:extLst>
+        </p:cNvPr>
+        <p:cNvGrpSpPr/>
+        <p:nvPr/>
+      </p:nvGrpSpPr>
+      <p:grpSpPr>
+        <a:xfrm>
+          <a:off x="0" y="0"/>
+          <a:ext cx="0" cy="0"/>
+          <a:chOff x="0" y="0"/>
+          <a:chExt cx="0" cy="0"/>
+        </a:xfrm>
+      </p:grpSpPr>
+      <p:sp>
+        <p:nvSpPr>
+          <p:cNvPr id="5" name="內容版面配置區 4">
+            <a:extLst>
+              <a:ext uri="{FF2B5EF4-FFF2-40B4-BE49-F238E27FC236}">
+                <a16:creationId xmlns:a16="http://schemas.microsoft.com/office/drawing/2014/main" id="{30426D3A-E977-42F9-3EA7-1F351BA8B471}"/>
+              </a:ext>
+            </a:extLst>
+          </p:cNvPr>
+          <p:cNvSpPr>
+            <a:spLocks noGrp="1"/>
+          </p:cNvSpPr>
+          <p:nvPr>
+            <p:ph idx="1"/>
+          </p:nvPr>
+        </p:nvSpPr>
+        <p:spPr>
+          <a:xfrm>
+            <a:off x="0" y="2084851"/>
+            <a:ext cx="12192000" cy="2404863"/>
+          </a:xfrm>
+        </p:spPr>
+        <p:txBody>
+          <a:bodyPr anchor="ctr">
+            <a:normAutofit/>
+          </a:bodyPr>
+          <a:lstStyle/>
+          <a:p>
+            <a:pPr marL="0" indent="0" algn="ctr">
+              <a:buNone/>
+            </a:pPr>
+            <a:r>
+              <a:rPr lang="zh-TW" altLang="en-US" sz="6400" b="1" dirty="0">
+                <a:solidFill>
+                  <a:srgbClr val="660033"/>
+                </a:solidFill>
+                <a:latin typeface="Microsoft JhengHei" pitchFamily="34" charset="-120"/>
+                <a:ea typeface="Microsoft JhengHei" pitchFamily="34" charset="-120"/>
+              </a:rPr>
+              <a:t>真神恩典</a:t>
+            </a:r>
+          </a:p>
+          <a:p>
+            <a:pPr marL="0" indent="0" algn="ctr">
+              <a:buNone/>
+            </a:pPr>
+            <a:r>
+              <a:rPr lang="zh-TW" altLang="en-US" sz="6400" b="1" dirty="0">
+                <a:solidFill>
+                  <a:srgbClr val="660033"/>
+                </a:solidFill>
+                <a:latin typeface="Microsoft JhengHei" pitchFamily="34" charset="-120"/>
+                <a:ea typeface="Microsoft JhengHei" pitchFamily="34" charset="-120"/>
+              </a:rPr>
+              <a:t>真神的恩典無限無量</a:t>
+            </a:r>
+          </a:p>
+        </p:txBody>
+      </p:sp>
+    </p:spTree>
+    <p:extLst>
+      <p:ext uri="{BB962C8B-B14F-4D97-AF65-F5344CB8AC3E}">
+        <p14:creationId xmlns:p14="http://schemas.microsoft.com/office/powerpoint/2010/main" val="2148718724"/>
+      </p:ext>
+    </p:extLst>
+  </p:cSld>
+  <p:clrMapOvr>
+    <a:masterClrMapping/>
+  </p:clrMapOvr>
+</p:sld>
+</file>
+
+<file path=ppt/slides/slide9.xml><?xml version="1.0" encoding="utf-8"?>
+<p:sld xmlns:a="http://schemas.openxmlformats.org/drawingml/2006/main" xmlns:r="http://schemas.openxmlformats.org/officeDocument/2006/relationships" xmlns:p="http://schemas.openxmlformats.org/presentationml/2006/main">
+  <p:cSld>
+    <p:spTree>
+      <p:nvGrpSpPr>
+        <p:cNvPr id="1" name="">
+          <a:extLst>
+            <a:ext uri="{FF2B5EF4-FFF2-40B4-BE49-F238E27FC236}">
+              <a16:creationId xmlns:a16="http://schemas.microsoft.com/office/drawing/2014/main" id="{2AFB2FCE-469D-DE57-5A9A-6FA4AFC6D75A}"/>
+            </a:ext>
+          </a:extLst>
+        </p:cNvPr>
+        <p:cNvGrpSpPr/>
+        <p:nvPr/>
+      </p:nvGrpSpPr>
+      <p:grpSpPr>
+        <a:xfrm>
+          <a:off x="0" y="0"/>
+          <a:ext cx="0" cy="0"/>
+          <a:chOff x="0" y="0"/>
+          <a:chExt cx="0" cy="0"/>
+        </a:xfrm>
+      </p:grpSpPr>
+      <p:sp>
+        <p:nvSpPr>
+          <p:cNvPr id="5" name="內容版面配置區 4">
+            <a:extLst>
+              <a:ext uri="{FF2B5EF4-FFF2-40B4-BE49-F238E27FC236}">
+                <a16:creationId xmlns:a16="http://schemas.microsoft.com/office/drawing/2014/main" id="{EA3DF253-FECD-6750-F29D-4A841180CB23}"/>
+              </a:ext>
+            </a:extLst>
+          </p:cNvPr>
+          <p:cNvSpPr>
+            <a:spLocks noGrp="1"/>
+          </p:cNvSpPr>
+          <p:nvPr>
+            <p:ph idx="1"/>
+          </p:nvPr>
+        </p:nvSpPr>
+        <p:spPr>
+          <a:xfrm>
+            <a:off x="0" y="2084851"/>
+            <a:ext cx="12192000" cy="2404863"/>
+          </a:xfrm>
+        </p:spPr>
+        <p:txBody>
+          <a:bodyPr anchor="ctr">
+            <a:normAutofit/>
+          </a:bodyPr>
+          <a:lstStyle/>
+          <a:p>
+            <a:pPr marL="0" indent="0" algn="ctr">
+              <a:buNone/>
+            </a:pPr>
+            <a:r>
+              <a:rPr lang="zh-TW" altLang="en-US" sz="6400" b="1" dirty="0">
+                <a:solidFill>
+                  <a:srgbClr val="660033"/>
+                </a:solidFill>
+                <a:latin typeface="Microsoft JhengHei" pitchFamily="34" charset="-120"/>
+                <a:ea typeface="Microsoft JhengHei" pitchFamily="34" charset="-120"/>
+              </a:rPr>
+              <a:t>真神恩典</a:t>
+            </a:r>
+          </a:p>
+          <a:p>
+            <a:pPr marL="0" indent="0" algn="ctr">
+              <a:buNone/>
+            </a:pPr>
+            <a:r>
+              <a:rPr lang="zh-TW" altLang="en-US" sz="6400" b="1" dirty="0">
+                <a:solidFill>
+                  <a:srgbClr val="660033"/>
+                </a:solidFill>
+                <a:latin typeface="Microsoft JhengHei" pitchFamily="34" charset="-120"/>
+                <a:ea typeface="Microsoft JhengHei" pitchFamily="34" charset="-120"/>
+              </a:rPr>
+              <a:t>真神恩典無限無量</a:t>
+            </a:r>
+          </a:p>
+        </p:txBody>
+      </p:sp>
+    </p:spTree>
+    <p:extLst>
+      <p:ext uri="{BB962C8B-B14F-4D97-AF65-F5344CB8AC3E}">
+        <p14:creationId xmlns:p14="http://schemas.microsoft.com/office/powerpoint/2010/main" val="541096398"/>
       </p:ext>
     </p:extLst>
   </p:cSld>
